--- a/python_course/chapter_10_error_handling/error_handling.pptx
+++ b/python_course/chapter_10_error_handling/error_handling.pptx
@@ -16,9 +16,6 @@
     <p:sldId id="264" r:id="rId15"/>
     <p:sldId id="265" r:id="rId16"/>
     <p:sldId id="266" r:id="rId17"/>
-    <p:sldId id="267" r:id="rId18"/>
-    <p:sldId id="268" r:id="rId19"/>
-    <p:sldId id="269" r:id="rId20"/>
   </p:sldIdLst>
   <p:sldSz cx="12191695" cy="6858000" type="screen4x3"/>
   <p:notesSz cx="6858000" cy="9144000"/>
@@ -3152,8 +3149,8 @@
         </p:nvSpPr>
         <p:spPr>
           <a:xfrm>
-            <a:off x="914400" y="1828800"/>
-            <a:ext cx="10360152" cy="1371600"/>
+            <a:off x="914400" y="2286000"/>
+            <a:ext cx="10360152" cy="1097280"/>
           </a:xfrm>
           <a:prstGeom prst="rect">
             <a:avLst/>
@@ -3167,14 +3164,14 @@
           <a:lstStyle/>
           <a:p>
             <a:pPr algn="ctr">
-              <a:defRPr sz="5400" b="1">
+              <a:defRPr sz="4800" b="1">
                 <a:solidFill>
                   <a:srgbClr val="003366"/>
                 </a:solidFill>
               </a:defRPr>
             </a:pPr>
             <a:r>
-              <a:t>Chapter 10</a:t>
+              <a:t>Chapter 10: Error Handling</a:t>
             </a:r>
           </a:p>
         </p:txBody>
@@ -3188,7 +3185,7 @@
         <p:spPr>
           <a:xfrm>
             <a:off x="914400" y="3657600"/>
-            <a:ext cx="10360152" cy="548640"/>
+            <a:ext cx="10360152" cy="731520"/>
           </a:xfrm>
           <a:prstGeom prst="rect">
             <a:avLst/>
@@ -3209,42 +3206,7 @@
               </a:defRPr>
             </a:pPr>
             <a:r>
-              <a:t>Error Handling - Making Programs Robust</a:t>
-            </a:r>
-          </a:p>
-        </p:txBody>
-      </p:sp>
-      <p:sp>
-        <p:nvSpPr>
-          <p:cNvPr id="5" name="TextBox 4"/>
-          <p:cNvSpPr txBox="1"/>
-          <p:nvPr/>
-        </p:nvSpPr>
-        <p:spPr>
-          <a:xfrm>
-            <a:off x="914400" y="4297680"/>
-            <a:ext cx="10360152" cy="548640"/>
-          </a:xfrm>
-          <a:prstGeom prst="rect">
-            <a:avLst/>
-          </a:prstGeom>
-          <a:noFill/>
-        </p:spPr>
-        <p:txBody>
-          <a:bodyPr wrap="none">
-            <a:spAutoFit/>
-          </a:bodyPr>
-          <a:lstStyle/>
-          <a:p>
-            <a:pPr algn="ctr">
-              <a:defRPr sz="2800">
-                <a:solidFill>
-                  <a:srgbClr val="4682B4"/>
-                </a:solidFill>
-              </a:defRPr>
-            </a:pPr>
-            <a:r>
-              <a:t>When Things Go Wrong (And They Will!)</a:t>
+              <a:t>Writing Robust Python Code</a:t>
             </a:r>
           </a:p>
         </p:txBody>
@@ -3361,8 +3323,8 @@
         </p:nvSpPr>
         <p:spPr>
           <a:xfrm>
-            <a:off x="457200" y="365760"/>
-            <a:ext cx="10972800" cy="731520"/>
+            <a:off x="457200" y="320040"/>
+            <a:ext cx="10972800" cy="640080"/>
           </a:xfrm>
           <a:prstGeom prst="rect">
             <a:avLst/>
@@ -3376,71 +3338,28 @@
           <a:lstStyle/>
           <a:p>
             <a:pPr>
-              <a:defRPr sz="4000" b="1">
+              <a:defRPr sz="3600" b="1">
                 <a:solidFill>
                   <a:srgbClr val="003366"/>
                 </a:solidFill>
               </a:defRPr>
             </a:pPr>
             <a:r>
-              <a:t>When to Use Error Handling</a:t>
-            </a:r>
-          </a:p>
-        </p:txBody>
-      </p:sp>
-      <p:sp>
-        <p:nvSpPr>
-          <p:cNvPr id="5" name="Rectangle 4"/>
-          <p:cNvSpPr/>
+              <a:t>Common Mistakes</a:t>
+            </a:r>
+          </a:p>
+        </p:txBody>
+      </p:sp>
+      <p:sp>
+        <p:nvSpPr>
+          <p:cNvPr id="5" name="TextBox 4"/>
+          <p:cNvSpPr txBox="1"/>
           <p:nvPr/>
         </p:nvSpPr>
         <p:spPr>
           <a:xfrm>
-            <a:off x="457200" y="1005840"/>
-            <a:ext cx="1828800" cy="45720"/>
-          </a:xfrm>
-          <a:prstGeom prst="rect">
-            <a:avLst/>
-          </a:prstGeom>
-          <a:solidFill>
-            <a:srgbClr val="0066CC"/>
-          </a:solidFill>
-          <a:ln>
-            <a:noFill/>
-          </a:ln>
-        </p:spPr>
-        <p:style>
-          <a:lnRef idx="1">
-            <a:schemeClr val="accent1"/>
-          </a:lnRef>
-          <a:fillRef idx="3">
-            <a:schemeClr val="accent1"/>
-          </a:fillRef>
-          <a:effectRef idx="2">
-            <a:schemeClr val="accent1"/>
-          </a:effectRef>
-          <a:fontRef idx="minor">
-            <a:schemeClr val="lt1"/>
-          </a:fontRef>
-        </p:style>
-        <p:txBody>
-          <a:bodyPr rtlCol="0" anchor="ctr"/>
-          <a:lstStyle/>
-          <a:p>
-            <a:pPr algn="ctr"/>
-          </a:p>
-        </p:txBody>
-      </p:sp>
-      <p:sp>
-        <p:nvSpPr>
-          <p:cNvPr id="6" name="TextBox 5"/>
-          <p:cNvSpPr txBox="1"/>
-          <p:nvPr/>
-        </p:nvSpPr>
-        <p:spPr>
-          <a:xfrm>
-            <a:off x="640080" y="1371600"/>
-            <a:ext cx="10789920" cy="4572000"/>
+            <a:off x="640080" y="1188720"/>
+            <a:ext cx="10789920" cy="5303520"/>
           </a:xfrm>
           <a:prstGeom prst="rect">
             <a:avLst/>
@@ -3455,151 +3374,271 @@
           <a:p>
             <a:pPr>
               <a:spcAft>
-                <a:spcPts val="800"/>
-              </a:spcAft>
-              <a:defRPr sz="2000" b="1">
-                <a:solidFill>
-                  <a:srgbClr val="333333"/>
-                </a:solidFill>
-              </a:defRPr>
-            </a:pPr>
-            <a:r>
-              <a:t>✓ Use Try-Except For:</a:t>
-            </a:r>
-          </a:p>
-          <a:p>
-            <a:pPr>
-              <a:spcAft>
-                <a:spcPts val="800"/>
-              </a:spcAft>
-              <a:defRPr sz="2000" b="1">
-                <a:solidFill>
-                  <a:srgbClr val="333333"/>
-                </a:solidFill>
-              </a:defRPr>
-            </a:pPr>
-            <a:r>
-              <a:t>When NOT to Use:</a:t>
-            </a:r>
-          </a:p>
-          <a:p>
-            <a:pPr>
-              <a:spcAft>
-                <a:spcPts val="800"/>
-              </a:spcAft>
-              <a:defRPr sz="2000" b="1">
-                <a:solidFill>
-                  <a:srgbClr val="333333"/>
-                </a:solidFill>
-              </a:defRPr>
-            </a:pPr>
-            <a:r>
-              <a:t>Remember:</a:t>
-            </a:r>
-          </a:p>
-          <a:p>
-            <a:pPr>
-              <a:spcAft>
-                <a:spcPts val="800"/>
-              </a:spcAft>
-              <a:defRPr sz="2000" b="1">
-                <a:solidFill>
-                  <a:srgbClr val="333333"/>
-                </a:solidFill>
-              </a:defRPr>
-            </a:pPr>
-            <a:r>
-              <a:t>Error handling makes your programrobust, not perfect!</a:t>
+                <a:spcPts val="600"/>
+              </a:spcAft>
+              <a:defRPr b="1" sz="2000">
+                <a:solidFill>
+                  <a:srgbClr val="333333"/>
+                </a:solidFill>
+              </a:defRPr>
+            </a:pPr>
+            <a:r>
+              <a:t>Mistake 1: Catching Too Broad</a:t>
+            </a:r>
+          </a:p>
+          <a:p>
+            <a:pPr>
+              <a:spcAft>
+                <a:spcPts val="600"/>
+              </a:spcAft>
+              <a:defRPr b="1" sz="2000">
+                <a:solidFill>
+                  <a:srgbClr val="333333"/>
+                </a:solidFill>
+              </a:defRPr>
+            </a:pPr>
+            <a:r>
+              <a:t>except Exception:  # Catches everything</a:t>
+            </a:r>
+          </a:p>
+          <a:p>
+            <a:pPr>
+              <a:spcAft>
+                <a:spcPts val="600"/>
+              </a:spcAft>
+              <a:defRPr b="1" sz="2000">
+                <a:solidFill>
+                  <a:srgbClr val="333333"/>
+                </a:solidFill>
+              </a:defRPr>
+            </a:pPr>
+            <a:r>
+              <a:t>Mistake 2: Silent Failures</a:t>
+            </a:r>
+          </a:p>
+          <a:p>
+            <a:pPr>
+              <a:spcAft>
+                <a:spcPts val="600"/>
+              </a:spcAft>
+              <a:defRPr b="1" sz="2000">
+                <a:solidFill>
+                  <a:srgbClr val="333333"/>
+                </a:solidFill>
+              </a:defRPr>
+            </a:pPr>
+            <a:r>
+              <a:t>try:</a:t>
+            </a:r>
+          </a:p>
+          <a:p>
+            <a:pPr>
+              <a:spcAft>
+                <a:spcPts val="600"/>
+              </a:spcAft>
+              <a:defRPr sz="1600">
+                <a:solidFill>
+                  <a:srgbClr val="333333"/>
+                </a:solidFill>
+              </a:defRPr>
+            </a:pPr>
+            <a:r>
+              <a:t>    risky_code()</a:t>
+            </a:r>
+          </a:p>
+          <a:p>
+            <a:pPr>
+              <a:spcAft>
+                <a:spcPts val="600"/>
+              </a:spcAft>
+              <a:defRPr b="1" sz="2000">
+                <a:solidFill>
+                  <a:srgbClr val="333333"/>
+                </a:solidFill>
+              </a:defRPr>
+            </a:pPr>
+            <a:r>
+              <a:t>except:</a:t>
+            </a:r>
+          </a:p>
+          <a:p>
+            <a:pPr>
+              <a:spcAft>
+                <a:spcPts val="600"/>
+              </a:spcAft>
+              <a:defRPr sz="1600">
+                <a:solidFill>
+                  <a:srgbClr val="333333"/>
+                </a:solidFill>
+              </a:defRPr>
+            </a:pPr>
+            <a:r>
+              <a:t>    pass  # Bad! Hides errors</a:t>
+            </a:r>
+          </a:p>
+          <a:p>
+            <a:pPr>
+              <a:spcAft>
+                <a:spcPts val="600"/>
+              </a:spcAft>
+              <a:defRPr b="1" sz="2000">
+                <a:solidFill>
+                  <a:srgbClr val="333333"/>
+                </a:solidFill>
+              </a:defRPr>
+            </a:pPr>
+            <a:r>
+              <a:t>Mistake 3: Wrong Exception</a:t>
+            </a:r>
+          </a:p>
+          <a:p>
+            <a:pPr>
+              <a:spcAft>
+                <a:spcPts val="600"/>
+              </a:spcAft>
+              <a:defRPr b="1" sz="2000">
+                <a:solidFill>
+                  <a:srgbClr val="333333"/>
+                </a:solidFill>
+              </a:defRPr>
+            </a:pPr>
+            <a:r>
+              <a:t>try:</a:t>
+            </a:r>
+          </a:p>
+          <a:p>
+            <a:pPr>
+              <a:spcAft>
+                <a:spcPts val="600"/>
+              </a:spcAft>
+              <a:defRPr sz="1600">
+                <a:solidFill>
+                  <a:srgbClr val="333333"/>
+                </a:solidFill>
+              </a:defRPr>
+            </a:pPr>
+            <a:r>
+              <a:t>    items[index]</a:t>
+            </a:r>
+          </a:p>
+          <a:p>
+            <a:pPr>
+              <a:spcAft>
+                <a:spcPts val="600"/>
+              </a:spcAft>
+              <a:defRPr b="1" sz="2000">
+                <a:solidFill>
+                  <a:srgbClr val="333333"/>
+                </a:solidFill>
+              </a:defRPr>
+            </a:pPr>
+            <a:r>
+              <a:t>except ValueError:  # Should be IndexError</a:t>
+            </a:r>
+          </a:p>
+          <a:p>
+            <a:pPr>
+              <a:spcAft>
+                <a:spcPts val="600"/>
+              </a:spcAft>
+              <a:defRPr sz="1600">
+                <a:solidFill>
+                  <a:srgbClr val="333333"/>
+                </a:solidFill>
+              </a:defRPr>
+            </a:pPr>
+            <a:r>
+              <a:t>    handle_error()</a:t>
+            </a:r>
+          </a:p>
+          <a:p>
+            <a:pPr>
+              <a:spcAft>
+                <a:spcPts val="600"/>
+              </a:spcAft>
+              <a:defRPr b="1" sz="2000">
+                <a:solidFill>
+                  <a:srgbClr val="333333"/>
+                </a:solidFill>
+              </a:defRPr>
+            </a:pPr>
+            <a:r>
+              <a:t>Mistake 4: Logic in except</a:t>
             </a:r>
           </a:p>
           <a:p>
             <a:pPr lvl="1">
               <a:spcAft>
-                <a:spcPts val="800"/>
-              </a:spcAft>
-              <a:defRPr sz="1800">
-                <a:solidFill>
-                  <a:srgbClr val="333333"/>
-                </a:solidFill>
-              </a:defRPr>
-            </a:pPr>
-            <a:r>
-              <a:t>• 📝 User input validation</a:t>
+                <a:spcPts val="400"/>
+              </a:spcAft>
+              <a:defRPr sz="1600">
+                <a:solidFill>
+                  <a:srgbClr val="333333"/>
+                </a:solidFill>
+              </a:defRPr>
+            </a:pPr>
+            <a:r>
+              <a:t>• Keep except blocks simple</a:t>
             </a:r>
           </a:p>
           <a:p>
             <a:pPr lvl="1">
               <a:spcAft>
-                <a:spcPts val="800"/>
-              </a:spcAft>
-              <a:defRPr sz="1800">
-                <a:solidFill>
-                  <a:srgbClr val="333333"/>
-                </a:solidFill>
-              </a:defRPr>
-            </a:pPr>
-            <a:r>
-              <a:t>• 📁 File operations</a:t>
+                <a:spcPts val="400"/>
+              </a:spcAft>
+              <a:defRPr sz="1600">
+                <a:solidFill>
+                  <a:srgbClr val="333333"/>
+                </a:solidFill>
+              </a:defRPr>
+            </a:pPr>
+            <a:r>
+              <a:t>• Extract complex logic</a:t>
+            </a:r>
+          </a:p>
+          <a:p>
+            <a:pPr>
+              <a:spcAft>
+                <a:spcPts val="600"/>
+              </a:spcAft>
+              <a:defRPr b="1" sz="2000">
+                <a:solidFill>
+                  <a:srgbClr val="333333"/>
+                </a:solidFill>
+              </a:defRPr>
+            </a:pPr>
+            <a:r>
+              <a:t>Mistake 5: Not Using finally</a:t>
             </a:r>
           </a:p>
           <a:p>
             <a:pPr lvl="1">
               <a:spcAft>
-                <a:spcPts val="800"/>
-              </a:spcAft>
-              <a:defRPr sz="1800">
-                <a:solidFill>
-                  <a:srgbClr val="333333"/>
-                </a:solidFill>
-              </a:defRPr>
-            </a:pPr>
-            <a:r>
-              <a:t>• 🌐 Network requests</a:t>
+                <a:spcPts val="400"/>
+              </a:spcAft>
+              <a:defRPr sz="1600">
+                <a:solidFill>
+                  <a:srgbClr val="333333"/>
+                </a:solidFill>
+              </a:defRPr>
+            </a:pPr>
+            <a:r>
+              <a:t>• Forgetting to close resources</a:t>
             </a:r>
           </a:p>
           <a:p>
             <a:pPr lvl="1">
               <a:spcAft>
-                <a:spcPts val="800"/>
-              </a:spcAft>
-              <a:defRPr sz="1800">
-                <a:solidFill>
-                  <a:srgbClr val="333333"/>
-                </a:solidFill>
-              </a:defRPr>
-            </a:pPr>
-            <a:r>
-              <a:t>• 🔄 Type conversions</a:t>
-            </a:r>
-          </a:p>
-          <a:p>
-            <a:pPr lvl="1">
-              <a:spcAft>
-                <a:spcPts val="800"/>
-              </a:spcAft>
-              <a:defRPr sz="1800">
-                <a:solidFill>
-                  <a:srgbClr val="333333"/>
-                </a:solidFill>
-              </a:defRPr>
-            </a:pPr>
-            <a:r>
-              <a:t>• 📊 Dictionary/list access</a:t>
-            </a:r>
-          </a:p>
-          <a:p>
-            <a:pPr lvl="1">
-              <a:spcAft>
-                <a:spcPts val="800"/>
-              </a:spcAft>
-              <a:defRPr sz="1800">
-                <a:solidFill>
-                  <a:srgbClr val="333333"/>
-                </a:solidFill>
-              </a:defRPr>
-            </a:pPr>
-            <a:r>
-              <a:t>• 🔢 Math operations (division)</a:t>
+                <a:spcPts val="400"/>
+              </a:spcAft>
+              <a:defRPr sz="1600">
+                <a:solidFill>
+                  <a:srgbClr val="333333"/>
+                </a:solidFill>
+              </a:defRPr>
+            </a:pPr>
+            <a:r>
+              <a:t>• Use "with" or finally</a:t>
             </a:r>
           </a:p>
         </p:txBody>
@@ -3716,8 +3755,8 @@
         </p:nvSpPr>
         <p:spPr>
           <a:xfrm>
-            <a:off x="457200" y="365760"/>
-            <a:ext cx="10972800" cy="731520"/>
+            <a:off x="457200" y="320040"/>
+            <a:ext cx="10972800" cy="640080"/>
           </a:xfrm>
           <a:prstGeom prst="rect">
             <a:avLst/>
@@ -3731,71 +3770,28 @@
           <a:lstStyle/>
           <a:p>
             <a:pPr>
-              <a:defRPr sz="4000" b="1">
+              <a:defRPr sz="3600" b="1">
                 <a:solidFill>
                   <a:srgbClr val="003366"/>
                 </a:solidFill>
               </a:defRPr>
             </a:pPr>
             <a:r>
-              <a:t>Real-World Example: Safe User Input</a:t>
-            </a:r>
-          </a:p>
-        </p:txBody>
-      </p:sp>
-      <p:sp>
-        <p:nvSpPr>
-          <p:cNvPr id="5" name="Rectangle 4"/>
-          <p:cNvSpPr/>
+              <a:t>When to Use Exceptions</a:t>
+            </a:r>
+          </a:p>
+        </p:txBody>
+      </p:sp>
+      <p:sp>
+        <p:nvSpPr>
+          <p:cNvPr id="5" name="TextBox 4"/>
+          <p:cNvSpPr txBox="1"/>
           <p:nvPr/>
         </p:nvSpPr>
         <p:spPr>
           <a:xfrm>
-            <a:off x="457200" y="1005840"/>
-            <a:ext cx="1828800" cy="45720"/>
-          </a:xfrm>
-          <a:prstGeom prst="rect">
-            <a:avLst/>
-          </a:prstGeom>
-          <a:solidFill>
-            <a:srgbClr val="0066CC"/>
-          </a:solidFill>
-          <a:ln>
-            <a:noFill/>
-          </a:ln>
-        </p:spPr>
-        <p:style>
-          <a:lnRef idx="1">
-            <a:schemeClr val="accent1"/>
-          </a:lnRef>
-          <a:fillRef idx="3">
-            <a:schemeClr val="accent1"/>
-          </a:fillRef>
-          <a:effectRef idx="2">
-            <a:schemeClr val="accent1"/>
-          </a:effectRef>
-          <a:fontRef idx="minor">
-            <a:schemeClr val="lt1"/>
-          </a:fontRef>
-        </p:style>
-        <p:txBody>
-          <a:bodyPr rtlCol="0" anchor="ctr"/>
-          <a:lstStyle/>
-          <a:p>
-            <a:pPr algn="ctr"/>
-          </a:p>
-        </p:txBody>
-      </p:sp>
-      <p:sp>
-        <p:nvSpPr>
-          <p:cNvPr id="6" name="TextBox 5"/>
-          <p:cNvSpPr txBox="1"/>
-          <p:nvPr/>
-        </p:nvSpPr>
-        <p:spPr>
-          <a:xfrm>
-            <a:off x="640080" y="1371600"/>
-            <a:ext cx="10789920" cy="4572000"/>
+            <a:off x="640080" y="1188720"/>
+            <a:ext cx="10789920" cy="5303520"/>
           </a:xfrm>
           <a:prstGeom prst="rect">
             <a:avLst/>
@@ -3810,76 +3806,376 @@
           <a:p>
             <a:pPr>
               <a:spcAft>
-                <a:spcPts val="800"/>
-              </a:spcAft>
-              <a:defRPr sz="2000" b="1">
-                <a:solidFill>
-                  <a:srgbClr val="333333"/>
-                </a:solidFill>
-              </a:defRPr>
-            </a:pPr>
-            <a:r>
-              <a:t>What This Does:</a:t>
+                <a:spcPts val="600"/>
+              </a:spcAft>
+              <a:defRPr b="1" sz="2000">
+                <a:solidFill>
+                  <a:srgbClr val="333333"/>
+                </a:solidFill>
+              </a:defRPr>
+            </a:pPr>
+            <a:r>
+              <a:t>Use Exceptions For:</a:t>
             </a:r>
           </a:p>
           <a:p>
             <a:pPr lvl="1">
               <a:spcAft>
-                <a:spcPts val="800"/>
-              </a:spcAft>
-              <a:defRPr sz="1800">
-                <a:solidFill>
-                  <a:srgbClr val="333333"/>
-                </a:solidFill>
-              </a:defRPr>
-            </a:pPr>
-            <a:r>
-              <a:t>• ✓ Keeps asking until valid input</a:t>
+                <a:spcPts val="400"/>
+              </a:spcAft>
+              <a:defRPr sz="1600">
+                <a:solidFill>
+                  <a:srgbClr val="333333"/>
+                </a:solidFill>
+              </a:defRPr>
+            </a:pPr>
+            <a:r>
+              <a:t>• Unexpected errors</a:t>
             </a:r>
           </a:p>
           <a:p>
             <a:pPr lvl="1">
               <a:spcAft>
-                <a:spcPts val="800"/>
-              </a:spcAft>
-              <a:defRPr sz="1800">
-                <a:solidFill>
-                  <a:srgbClr val="333333"/>
-                </a:solidFill>
-              </a:defRPr>
-            </a:pPr>
-            <a:r>
-              <a:t>• ✓ Handles non-numeric input</a:t>
+                <a:spcPts val="400"/>
+              </a:spcAft>
+              <a:defRPr sz="1600">
+                <a:solidFill>
+                  <a:srgbClr val="333333"/>
+                </a:solidFill>
+              </a:defRPr>
+            </a:pPr>
+            <a:r>
+              <a:t>• External dependencies</a:t>
             </a:r>
           </a:p>
           <a:p>
             <a:pPr lvl="1">
               <a:spcAft>
-                <a:spcPts val="800"/>
-              </a:spcAft>
-              <a:defRPr sz="1800">
-                <a:solidFill>
-                  <a:srgbClr val="333333"/>
-                </a:solidFill>
-              </a:defRPr>
-            </a:pPr>
-            <a:r>
-              <a:t>• ✓ Validates age range</a:t>
+                <a:spcPts val="400"/>
+              </a:spcAft>
+              <a:defRPr sz="1600">
+                <a:solidFill>
+                  <a:srgbClr val="333333"/>
+                </a:solidFill>
+              </a:defRPr>
+            </a:pPr>
+            <a:r>
+              <a:t>• User input validation</a:t>
             </a:r>
           </a:p>
           <a:p>
             <a:pPr lvl="1">
               <a:spcAft>
-                <a:spcPts val="800"/>
-              </a:spcAft>
-              <a:defRPr sz="1800">
-                <a:solidFill>
-                  <a:srgbClr val="333333"/>
-                </a:solidFill>
-              </a:defRPr>
-            </a:pPr>
-            <a:r>
-              <a:t>• ✓ Provides clear error messages</a:t>
+                <a:spcPts val="400"/>
+              </a:spcAft>
+              <a:defRPr sz="1600">
+                <a:solidFill>
+                  <a:srgbClr val="333333"/>
+                </a:solidFill>
+              </a:defRPr>
+            </a:pPr>
+            <a:r>
+              <a:t>• Resource management</a:t>
+            </a:r>
+          </a:p>
+          <a:p>
+            <a:pPr>
+              <a:spcAft>
+                <a:spcPts val="600"/>
+              </a:spcAft>
+              <a:defRPr b="1" sz="2000">
+                <a:solidFill>
+                  <a:srgbClr val="333333"/>
+                </a:solidFill>
+              </a:defRPr>
+            </a:pPr>
+            <a:r>
+              <a:t>Don't Use For:</a:t>
+            </a:r>
+          </a:p>
+          <a:p>
+            <a:pPr lvl="1">
+              <a:spcAft>
+                <a:spcPts val="400"/>
+              </a:spcAft>
+              <a:defRPr sz="1600">
+                <a:solidFill>
+                  <a:srgbClr val="333333"/>
+                </a:solidFill>
+              </a:defRPr>
+            </a:pPr>
+            <a:r>
+              <a:t>• Normal control flow</a:t>
+            </a:r>
+          </a:p>
+          <a:p>
+            <a:pPr lvl="1">
+              <a:spcAft>
+                <a:spcPts val="400"/>
+              </a:spcAft>
+              <a:defRPr sz="1600">
+                <a:solidFill>
+                  <a:srgbClr val="333333"/>
+                </a:solidFill>
+              </a:defRPr>
+            </a:pPr>
+            <a:r>
+              <a:t>• Expected conditions</a:t>
+            </a:r>
+          </a:p>
+          <a:p>
+            <a:pPr lvl="1">
+              <a:spcAft>
+                <a:spcPts val="400"/>
+              </a:spcAft>
+              <a:defRPr sz="1600">
+                <a:solidFill>
+                  <a:srgbClr val="333333"/>
+                </a:solidFill>
+              </a:defRPr>
+            </a:pPr>
+            <a:r>
+              <a:t>• Performance-critical code</a:t>
+            </a:r>
+          </a:p>
+          <a:p>
+            <a:pPr>
+              <a:spcAft>
+                <a:spcPts val="600"/>
+              </a:spcAft>
+              <a:defRPr b="1" sz="2000">
+                <a:solidFill>
+                  <a:srgbClr val="333333"/>
+                </a:solidFill>
+              </a:defRPr>
+            </a:pPr>
+            <a:r>
+              <a:t>Example - Good:</a:t>
+            </a:r>
+          </a:p>
+          <a:p>
+            <a:pPr>
+              <a:spcAft>
+                <a:spcPts val="600"/>
+              </a:spcAft>
+              <a:defRPr b="1" sz="2000">
+                <a:solidFill>
+                  <a:srgbClr val="333333"/>
+                </a:solidFill>
+              </a:defRPr>
+            </a:pPr>
+            <a:r>
+              <a:t>try:</a:t>
+            </a:r>
+          </a:p>
+          <a:p>
+            <a:pPr>
+              <a:spcAft>
+                <a:spcPts val="600"/>
+              </a:spcAft>
+              <a:defRPr sz="1600">
+                <a:solidFill>
+                  <a:srgbClr val="333333"/>
+                </a:solidFill>
+              </a:defRPr>
+            </a:pPr>
+            <a:r>
+              <a:t>    file = open("config.json")</a:t>
+            </a:r>
+          </a:p>
+          <a:p>
+            <a:pPr>
+              <a:spcAft>
+                <a:spcPts val="600"/>
+              </a:spcAft>
+              <a:defRPr b="1" sz="2000">
+                <a:solidFill>
+                  <a:srgbClr val="333333"/>
+                </a:solidFill>
+              </a:defRPr>
+            </a:pPr>
+            <a:r>
+              <a:t>except FileNotFoundError:</a:t>
+            </a:r>
+          </a:p>
+          <a:p>
+            <a:pPr>
+              <a:spcAft>
+                <a:spcPts val="600"/>
+              </a:spcAft>
+              <a:defRPr sz="1600">
+                <a:solidFill>
+                  <a:srgbClr val="333333"/>
+                </a:solidFill>
+              </a:defRPr>
+            </a:pPr>
+            <a:r>
+              <a:t>    use_defaults()</a:t>
+            </a:r>
+          </a:p>
+          <a:p>
+            <a:pPr>
+              <a:spcAft>
+                <a:spcPts val="600"/>
+              </a:spcAft>
+              <a:defRPr b="1" sz="2000">
+                <a:solidFill>
+                  <a:srgbClr val="333333"/>
+                </a:solidFill>
+              </a:defRPr>
+            </a:pPr>
+            <a:r>
+              <a:t>Example - Bad:</a:t>
+            </a:r>
+          </a:p>
+          <a:p>
+            <a:pPr>
+              <a:spcAft>
+                <a:spcPts val="600"/>
+              </a:spcAft>
+              <a:defRPr b="1" sz="2000">
+                <a:solidFill>
+                  <a:srgbClr val="333333"/>
+                </a:solidFill>
+              </a:defRPr>
+            </a:pPr>
+            <a:r>
+              <a:t>try:</a:t>
+            </a:r>
+          </a:p>
+          <a:p>
+            <a:pPr>
+              <a:spcAft>
+                <a:spcPts val="600"/>
+              </a:spcAft>
+              <a:defRPr sz="1600">
+                <a:solidFill>
+                  <a:srgbClr val="333333"/>
+                </a:solidFill>
+              </a:defRPr>
+            </a:pPr>
+            <a:r>
+              <a:t>    if user in users:</a:t>
+            </a:r>
+          </a:p>
+          <a:p>
+            <a:pPr>
+              <a:spcAft>
+                <a:spcPts val="600"/>
+              </a:spcAft>
+              <a:defRPr sz="1600">
+                <a:solidFill>
+                  <a:srgbClr val="333333"/>
+                </a:solidFill>
+              </a:defRPr>
+            </a:pPr>
+            <a:r>
+              <a:t>        login(user)</a:t>
+            </a:r>
+          </a:p>
+          <a:p>
+            <a:pPr>
+              <a:spcAft>
+                <a:spcPts val="600"/>
+              </a:spcAft>
+              <a:defRPr b="1" sz="2000">
+                <a:solidFill>
+                  <a:srgbClr val="333333"/>
+                </a:solidFill>
+              </a:defRPr>
+            </a:pPr>
+            <a:r>
+              <a:t>except KeyError:</a:t>
+            </a:r>
+          </a:p>
+          <a:p>
+            <a:pPr>
+              <a:spcAft>
+                <a:spcPts val="600"/>
+              </a:spcAft>
+              <a:defRPr sz="1600">
+                <a:solidFill>
+                  <a:srgbClr val="333333"/>
+                </a:solidFill>
+              </a:defRPr>
+            </a:pPr>
+            <a:r>
+              <a:t>    create_user()</a:t>
+            </a:r>
+          </a:p>
+          <a:p>
+            <a:pPr>
+              <a:spcAft>
+                <a:spcPts val="600"/>
+              </a:spcAft>
+              <a:defRPr b="1" sz="2000">
+                <a:solidFill>
+                  <a:srgbClr val="333333"/>
+                </a:solidFill>
+              </a:defRPr>
+            </a:pPr>
+            <a:r>
+              <a:t>Better:</a:t>
+            </a:r>
+          </a:p>
+          <a:p>
+            <a:pPr>
+              <a:spcAft>
+                <a:spcPts val="600"/>
+              </a:spcAft>
+              <a:defRPr b="1" sz="2000">
+                <a:solidFill>
+                  <a:srgbClr val="333333"/>
+                </a:solidFill>
+              </a:defRPr>
+            </a:pPr>
+            <a:r>
+              <a:t>if user in users:</a:t>
+            </a:r>
+          </a:p>
+          <a:p>
+            <a:pPr>
+              <a:spcAft>
+                <a:spcPts val="600"/>
+              </a:spcAft>
+              <a:defRPr sz="1600">
+                <a:solidFill>
+                  <a:srgbClr val="333333"/>
+                </a:solidFill>
+              </a:defRPr>
+            </a:pPr>
+            <a:r>
+              <a:t>    login(user)</a:t>
+            </a:r>
+          </a:p>
+          <a:p>
+            <a:pPr>
+              <a:spcAft>
+                <a:spcPts val="600"/>
+              </a:spcAft>
+              <a:defRPr b="1" sz="2000">
+                <a:solidFill>
+                  <a:srgbClr val="333333"/>
+                </a:solidFill>
+              </a:defRPr>
+            </a:pPr>
+            <a:r>
+              <a:t>else:</a:t>
+            </a:r>
+          </a:p>
+          <a:p>
+            <a:pPr>
+              <a:spcAft>
+                <a:spcPts val="600"/>
+              </a:spcAft>
+              <a:defRPr sz="1600">
+                <a:solidFill>
+                  <a:srgbClr val="333333"/>
+                </a:solidFill>
+              </a:defRPr>
+            </a:pPr>
+            <a:r>
+              <a:t>    create_user()</a:t>
             </a:r>
           </a:p>
         </p:txBody>
@@ -3892,7 +4188,7 @@
 </p:sld>
 </file>
 
-<file path=ppt/slides/slide12.xml><?xml version="1.0" encoding="utf-8"?>
+<file path=ppt/slides/slide2.xml><?xml version="1.0" encoding="utf-8"?>
 <p:sld xmlns:a="http://schemas.openxmlformats.org/drawingml/2006/main" xmlns:p="http://schemas.openxmlformats.org/presentationml/2006/main" xmlns:r="http://schemas.openxmlformats.org/officeDocument/2006/relationships">
   <p:cSld>
     <p:spTree>
@@ -3996,8 +4292,8 @@
         </p:nvSpPr>
         <p:spPr>
           <a:xfrm>
-            <a:off x="457200" y="365760"/>
-            <a:ext cx="10972800" cy="731520"/>
+            <a:off x="457200" y="320040"/>
+            <a:ext cx="10972800" cy="640080"/>
           </a:xfrm>
           <a:prstGeom prst="rect">
             <a:avLst/>
@@ -4011,71 +4307,28 @@
           <a:lstStyle/>
           <a:p>
             <a:pPr>
-              <a:defRPr sz="4000" b="1">
+              <a:defRPr sz="3600" b="1">
                 <a:solidFill>
                   <a:srgbClr val="003366"/>
                 </a:solidFill>
               </a:defRPr>
             </a:pPr>
             <a:r>
-              <a:t>Debugging Strategies</a:t>
-            </a:r>
-          </a:p>
-        </p:txBody>
-      </p:sp>
-      <p:sp>
-        <p:nvSpPr>
-          <p:cNvPr id="5" name="Rectangle 4"/>
-          <p:cNvSpPr/>
+              <a:t>Why Error Handling?</a:t>
+            </a:r>
+          </a:p>
+        </p:txBody>
+      </p:sp>
+      <p:sp>
+        <p:nvSpPr>
+          <p:cNvPr id="5" name="TextBox 4"/>
+          <p:cNvSpPr txBox="1"/>
           <p:nvPr/>
         </p:nvSpPr>
         <p:spPr>
           <a:xfrm>
-            <a:off x="457200" y="1005840"/>
-            <a:ext cx="1828800" cy="45720"/>
-          </a:xfrm>
-          <a:prstGeom prst="rect">
-            <a:avLst/>
-          </a:prstGeom>
-          <a:solidFill>
-            <a:srgbClr val="0066CC"/>
-          </a:solidFill>
-          <a:ln>
-            <a:noFill/>
-          </a:ln>
-        </p:spPr>
-        <p:style>
-          <a:lnRef idx="1">
-            <a:schemeClr val="accent1"/>
-          </a:lnRef>
-          <a:fillRef idx="3">
-            <a:schemeClr val="accent1"/>
-          </a:fillRef>
-          <a:effectRef idx="2">
-            <a:schemeClr val="accent1"/>
-          </a:effectRef>
-          <a:fontRef idx="minor">
-            <a:schemeClr val="lt1"/>
-          </a:fontRef>
-        </p:style>
-        <p:txBody>
-          <a:bodyPr rtlCol="0" anchor="ctr"/>
-          <a:lstStyle/>
-          <a:p>
-            <a:pPr algn="ctr"/>
-          </a:p>
-        </p:txBody>
-      </p:sp>
-      <p:sp>
-        <p:nvSpPr>
-          <p:cNvPr id="6" name="TextBox 5"/>
-          <p:cNvSpPr txBox="1"/>
-          <p:nvPr/>
-        </p:nvSpPr>
-        <p:spPr>
-          <a:xfrm>
-            <a:off x="640080" y="1371600"/>
-            <a:ext cx="10789920" cy="4572000"/>
+            <a:off x="640080" y="1188720"/>
+            <a:ext cx="10789920" cy="5303520"/>
           </a:xfrm>
           <a:prstGeom prst="rect">
             <a:avLst/>
@@ -4090,151 +4343,256 @@
           <a:p>
             <a:pPr>
               <a:spcAft>
-                <a:spcPts val="800"/>
-              </a:spcAft>
-              <a:defRPr sz="2000" b="1">
-                <a:solidFill>
-                  <a:srgbClr val="333333"/>
-                </a:solidFill>
-              </a:defRPr>
-            </a:pPr>
-            <a:r>
-              <a:t>Read Error Messages!</a:t>
-            </a:r>
-          </a:p>
-          <a:p>
-            <a:pPr>
-              <a:spcAft>
-                <a:spcPts val="800"/>
-              </a:spcAft>
-              <a:defRPr sz="2000" b="1">
-                <a:solidFill>
-                  <a:srgbClr val="333333"/>
-                </a:solidFill>
-              </a:defRPr>
-            </a:pPr>
-            <a:r>
-              <a:t>Print Debugging</a:t>
-            </a:r>
-          </a:p>
-          <a:p>
-            <a:pPr>
-              <a:spcAft>
-                <a:spcPts val="800"/>
-              </a:spcAft>
-              <a:defRPr sz="2000" b="1">
-                <a:solidFill>
-                  <a:srgbClr val="333333"/>
-                </a:solidFill>
-              </a:defRPr>
-            </a:pPr>
-            <a:r>
-              <a:t>Test with Simple Cases</a:t>
-            </a:r>
-          </a:p>
-          <a:p>
-            <a:pPr>
-              <a:spcAft>
-                <a:spcPts val="800"/>
-              </a:spcAft>
-              <a:defRPr sz="2000" b="1">
-                <a:solidFill>
-                  <a:srgbClr val="333333"/>
-                </a:solidFill>
-              </a:defRPr>
-            </a:pPr>
-            <a:r>
-              <a:t>Start with known inputs to isolate problems</a:t>
-            </a:r>
-          </a:p>
-          <a:p>
-            <a:pPr>
-              <a:spcAft>
-                <a:spcPts val="800"/>
-              </a:spcAft>
-              <a:defRPr sz="2000" b="1">
-                <a:solidFill>
-                  <a:srgbClr val="333333"/>
-                </a:solidFill>
-              </a:defRPr>
-            </a:pPr>
-            <a:r>
-              <a:t>Break Down Complex Code</a:t>
-            </a:r>
-          </a:p>
-          <a:p>
-            <a:pPr>
-              <a:spcAft>
-                <a:spcPts val="800"/>
-              </a:spcAft>
-              <a:defRPr sz="2000" b="1">
-                <a:solidFill>
-                  <a:srgbClr val="333333"/>
-                </a:solidFill>
-              </a:defRPr>
-            </a:pPr>
-            <a:r>
-              <a:t>Test each part separately</a:t>
-            </a:r>
-          </a:p>
-          <a:p>
-            <a:pPr>
-              <a:spcAft>
-                <a:spcPts val="800"/>
-              </a:spcAft>
-              <a:defRPr sz="2000" b="1">
-                <a:solidFill>
-                  <a:srgbClr val="333333"/>
-                </a:solidFill>
-              </a:defRPr>
-            </a:pPr>
-            <a:r>
-              <a:t>Errors are learning opportunities!</a:t>
+                <a:spcPts val="600"/>
+              </a:spcAft>
+              <a:defRPr b="1" sz="2000">
+                <a:solidFill>
+                  <a:srgbClr val="333333"/>
+                </a:solidFill>
+              </a:defRPr>
+            </a:pPr>
+            <a:r>
+              <a:t>Problems Without Handling:</a:t>
             </a:r>
           </a:p>
           <a:p>
             <a:pPr lvl="1">
               <a:spcAft>
-                <a:spcPts val="800"/>
-              </a:spcAft>
-              <a:defRPr sz="1800">
-                <a:solidFill>
-                  <a:srgbClr val="333333"/>
-                </a:solidFill>
-              </a:defRPr>
-            </a:pPr>
-            <a:r>
-              <a:t>• 📍 Shows line number</a:t>
+                <a:spcPts val="400"/>
+              </a:spcAft>
+              <a:defRPr sz="1600">
+                <a:solidFill>
+                  <a:srgbClr val="333333"/>
+                </a:solidFill>
+              </a:defRPr>
+            </a:pPr>
+            <a:r>
+              <a:t>• Programs crash</a:t>
             </a:r>
           </a:p>
           <a:p>
             <a:pPr lvl="1">
               <a:spcAft>
-                <a:spcPts val="800"/>
-              </a:spcAft>
-              <a:defRPr sz="1800">
-                <a:solidFill>
-                  <a:srgbClr val="333333"/>
-                </a:solidFill>
-              </a:defRPr>
-            </a:pPr>
-            <a:r>
-              <a:t>• 🏷️ Shows exception type</a:t>
+                <a:spcPts val="400"/>
+              </a:spcAft>
+              <a:defRPr sz="1600">
+                <a:solidFill>
+                  <a:srgbClr val="333333"/>
+                </a:solidFill>
+              </a:defRPr>
+            </a:pPr>
+            <a:r>
+              <a:t>• Poor user experience</a:t>
             </a:r>
           </a:p>
           <a:p>
             <a:pPr lvl="1">
               <a:spcAft>
-                <a:spcPts val="800"/>
-              </a:spcAft>
-              <a:defRPr sz="1800">
-                <a:solidFill>
-                  <a:srgbClr val="333333"/>
-                </a:solidFill>
-              </a:defRPr>
-            </a:pPr>
-            <a:r>
-              <a:t>• 💬 Describes the problem</a:t>
+                <a:spcPts val="400"/>
+              </a:spcAft>
+              <a:defRPr sz="1600">
+                <a:solidFill>
+                  <a:srgbClr val="333333"/>
+                </a:solidFill>
+              </a:defRPr>
+            </a:pPr>
+            <a:r>
+              <a:t>• Lost data</a:t>
+            </a:r>
+          </a:p>
+          <a:p>
+            <a:pPr lvl="1">
+              <a:spcAft>
+                <a:spcPts val="400"/>
+              </a:spcAft>
+              <a:defRPr sz="1600">
+                <a:solidFill>
+                  <a:srgbClr val="333333"/>
+                </a:solidFill>
+              </a:defRPr>
+            </a:pPr>
+            <a:r>
+              <a:t>• No recovery</a:t>
+            </a:r>
+          </a:p>
+          <a:p>
+            <a:pPr>
+              <a:spcAft>
+                <a:spcPts val="600"/>
+              </a:spcAft>
+              <a:defRPr b="1" sz="2000">
+                <a:solidFill>
+                  <a:srgbClr val="333333"/>
+                </a:solidFill>
+              </a:defRPr>
+            </a:pPr>
+            <a:r>
+              <a:t>Benefits of Handling:</a:t>
+            </a:r>
+          </a:p>
+          <a:p>
+            <a:pPr lvl="1">
+              <a:spcAft>
+                <a:spcPts val="400"/>
+              </a:spcAft>
+              <a:defRPr sz="1600">
+                <a:solidFill>
+                  <a:srgbClr val="333333"/>
+                </a:solidFill>
+              </a:defRPr>
+            </a:pPr>
+            <a:r>
+              <a:t>• Graceful degradation</a:t>
+            </a:r>
+          </a:p>
+          <a:p>
+            <a:pPr lvl="1">
+              <a:spcAft>
+                <a:spcPts val="400"/>
+              </a:spcAft>
+              <a:defRPr sz="1600">
+                <a:solidFill>
+                  <a:srgbClr val="333333"/>
+                </a:solidFill>
+              </a:defRPr>
+            </a:pPr>
+            <a:r>
+              <a:t>• User-friendly messages</a:t>
+            </a:r>
+          </a:p>
+          <a:p>
+            <a:pPr lvl="1">
+              <a:spcAft>
+                <a:spcPts val="400"/>
+              </a:spcAft>
+              <a:defRPr sz="1600">
+                <a:solidFill>
+                  <a:srgbClr val="333333"/>
+                </a:solidFill>
+              </a:defRPr>
+            </a:pPr>
+            <a:r>
+              <a:t>• Program continues running</a:t>
+            </a:r>
+          </a:p>
+          <a:p>
+            <a:pPr lvl="1">
+              <a:spcAft>
+                <a:spcPts val="400"/>
+              </a:spcAft>
+              <a:defRPr sz="1600">
+                <a:solidFill>
+                  <a:srgbClr val="333333"/>
+                </a:solidFill>
+              </a:defRPr>
+            </a:pPr>
+            <a:r>
+              <a:t>• Logging and debugging</a:t>
+            </a:r>
+          </a:p>
+          <a:p>
+            <a:pPr>
+              <a:spcAft>
+                <a:spcPts val="600"/>
+              </a:spcAft>
+              <a:defRPr b="1" sz="2000">
+                <a:solidFill>
+                  <a:srgbClr val="333333"/>
+                </a:solidFill>
+              </a:defRPr>
+            </a:pPr>
+            <a:r>
+              <a:t>Types of Errors:</a:t>
+            </a:r>
+          </a:p>
+          <a:p>
+            <a:pPr lvl="1">
+              <a:spcAft>
+                <a:spcPts val="400"/>
+              </a:spcAft>
+              <a:defRPr sz="1600">
+                <a:solidFill>
+                  <a:srgbClr val="333333"/>
+                </a:solidFill>
+              </a:defRPr>
+            </a:pPr>
+            <a:r>
+              <a:t>• Syntax errors: Code won't run</a:t>
+            </a:r>
+          </a:p>
+          <a:p>
+            <a:pPr lvl="1">
+              <a:spcAft>
+                <a:spcPts val="400"/>
+              </a:spcAft>
+              <a:defRPr sz="1600">
+                <a:solidFill>
+                  <a:srgbClr val="333333"/>
+                </a:solidFill>
+              </a:defRPr>
+            </a:pPr>
+            <a:r>
+              <a:t>• Runtime errors: Crash during execution</a:t>
+            </a:r>
+          </a:p>
+          <a:p>
+            <a:pPr lvl="1">
+              <a:spcAft>
+                <a:spcPts val="400"/>
+              </a:spcAft>
+              <a:defRPr sz="1600">
+                <a:solidFill>
+                  <a:srgbClr val="333333"/>
+                </a:solidFill>
+              </a:defRPr>
+            </a:pPr>
+            <a:r>
+              <a:t>• Logic errors: Wrong results</a:t>
+            </a:r>
+          </a:p>
+          <a:p>
+            <a:pPr>
+              <a:spcAft>
+                <a:spcPts val="600"/>
+              </a:spcAft>
+              <a:defRPr b="1" sz="2000">
+                <a:solidFill>
+                  <a:srgbClr val="333333"/>
+                </a:solidFill>
+              </a:defRPr>
+            </a:pPr>
+            <a:r>
+              <a:t>We Focus On:</a:t>
+            </a:r>
+          </a:p>
+          <a:p>
+            <a:pPr lvl="1">
+              <a:spcAft>
+                <a:spcPts val="400"/>
+              </a:spcAft>
+              <a:defRPr sz="1600">
+                <a:solidFill>
+                  <a:srgbClr val="333333"/>
+                </a:solidFill>
+              </a:defRPr>
+            </a:pPr>
+            <a:r>
+              <a:t>• Runtime error handling</a:t>
+            </a:r>
+          </a:p>
+          <a:p>
+            <a:pPr lvl="1">
+              <a:spcAft>
+                <a:spcPts val="400"/>
+              </a:spcAft>
+              <a:defRPr sz="1600">
+                <a:solidFill>
+                  <a:srgbClr val="333333"/>
+                </a:solidFill>
+              </a:defRPr>
+            </a:pPr>
+            <a:r>
+              <a:t>• Exceptions management</a:t>
             </a:r>
           </a:p>
         </p:txBody>
@@ -4247,7 +4605,7 @@
 </p:sld>
 </file>
 
-<file path=ppt/slides/slide13.xml><?xml version="1.0" encoding="utf-8"?>
+<file path=ppt/slides/slide3.xml><?xml version="1.0" encoding="utf-8"?>
 <p:sld xmlns:a="http://schemas.openxmlformats.org/drawingml/2006/main" xmlns:p="http://schemas.openxmlformats.org/presentationml/2006/main" xmlns:r="http://schemas.openxmlformats.org/officeDocument/2006/relationships">
   <p:cSld>
     <p:spTree>
@@ -4351,8 +4709,8 @@
         </p:nvSpPr>
         <p:spPr>
           <a:xfrm>
-            <a:off x="457200" y="365760"/>
-            <a:ext cx="10972800" cy="731520"/>
+            <a:off x="457200" y="320040"/>
+            <a:ext cx="10972800" cy="640080"/>
           </a:xfrm>
           <a:prstGeom prst="rect">
             <a:avLst/>
@@ -4366,71 +4724,28 @@
           <a:lstStyle/>
           <a:p>
             <a:pPr>
-              <a:defRPr sz="4000" b="1">
+              <a:defRPr sz="3600" b="1">
                 <a:solidFill>
                   <a:srgbClr val="003366"/>
                 </a:solidFill>
               </a:defRPr>
             </a:pPr>
             <a:r>
-              <a:t>Key Concepts</a:t>
-            </a:r>
-          </a:p>
-        </p:txBody>
-      </p:sp>
-      <p:sp>
-        <p:nvSpPr>
-          <p:cNvPr id="5" name="Rectangle 4"/>
-          <p:cNvSpPr/>
+              <a:t>Common Exceptions</a:t>
+            </a:r>
+          </a:p>
+        </p:txBody>
+      </p:sp>
+      <p:sp>
+        <p:nvSpPr>
+          <p:cNvPr id="5" name="TextBox 4"/>
+          <p:cNvSpPr txBox="1"/>
           <p:nvPr/>
         </p:nvSpPr>
         <p:spPr>
           <a:xfrm>
-            <a:off x="457200" y="1005840"/>
-            <a:ext cx="1828800" cy="45720"/>
-          </a:xfrm>
-          <a:prstGeom prst="rect">
-            <a:avLst/>
-          </a:prstGeom>
-          <a:solidFill>
-            <a:srgbClr val="0066CC"/>
-          </a:solidFill>
-          <a:ln>
-            <a:noFill/>
-          </a:ln>
-        </p:spPr>
-        <p:style>
-          <a:lnRef idx="1">
-            <a:schemeClr val="accent1"/>
-          </a:lnRef>
-          <a:fillRef idx="3">
-            <a:schemeClr val="accent1"/>
-          </a:fillRef>
-          <a:effectRef idx="2">
-            <a:schemeClr val="accent1"/>
-          </a:effectRef>
-          <a:fontRef idx="minor">
-            <a:schemeClr val="lt1"/>
-          </a:fontRef>
-        </p:style>
-        <p:txBody>
-          <a:bodyPr rtlCol="0" anchor="ctr"/>
-          <a:lstStyle/>
-          <a:p>
-            <a:pPr algn="ctr"/>
-          </a:p>
-        </p:txBody>
-      </p:sp>
-      <p:sp>
-        <p:nvSpPr>
-          <p:cNvPr id="6" name="TextBox 5"/>
-          <p:cNvSpPr txBox="1"/>
-          <p:nvPr/>
-        </p:nvSpPr>
-        <p:spPr>
-          <a:xfrm>
-            <a:off x="640080" y="1371600"/>
-            <a:ext cx="10789920" cy="4572000"/>
+            <a:off x="640080" y="1188720"/>
+            <a:ext cx="10789920" cy="5303520"/>
           </a:xfrm>
           <a:prstGeom prst="rect">
             <a:avLst/>
@@ -4445,151 +4760,286 @@
           <a:p>
             <a:pPr>
               <a:spcAft>
-                <a:spcPts val="800"/>
-              </a:spcAft>
-              <a:defRPr sz="2000" b="1">
-                <a:solidFill>
-                  <a:srgbClr val="333333"/>
-                </a:solidFill>
-              </a:defRPr>
-            </a:pPr>
-            <a:r>
-              <a:t>✓ Try-Except Blocks</a:t>
-            </a:r>
-          </a:p>
-          <a:p>
-            <a:pPr>
-              <a:spcAft>
-                <a:spcPts val="800"/>
-              </a:spcAft>
-              <a:defRPr sz="2000" b="1">
-                <a:solidFill>
-                  <a:srgbClr val="333333"/>
-                </a:solidFill>
-              </a:defRPr>
-            </a:pPr>
-            <a:r>
-              <a:t>Catch and handle errors gracefully</a:t>
-            </a:r>
-          </a:p>
-          <a:p>
-            <a:pPr>
-              <a:spcAft>
-                <a:spcPts val="800"/>
-              </a:spcAft>
-              <a:defRPr sz="2000" b="1">
-                <a:solidFill>
-                  <a:srgbClr val="333333"/>
-                </a:solidFill>
-              </a:defRPr>
-            </a:pPr>
-            <a:r>
-              <a:t>✓ Specific Exceptions</a:t>
-            </a:r>
-          </a:p>
-          <a:p>
-            <a:pPr>
-              <a:spcAft>
-                <a:spcPts val="800"/>
-              </a:spcAft>
-              <a:defRPr sz="2000" b="1">
-                <a:solidFill>
-                  <a:srgbClr val="333333"/>
-                </a:solidFill>
-              </a:defRPr>
-            </a:pPr>
-            <a:r>
-              <a:t>Catch exactly what you expect</a:t>
-            </a:r>
-          </a:p>
-          <a:p>
-            <a:pPr>
-              <a:spcAft>
-                <a:spcPts val="800"/>
-              </a:spcAft>
-              <a:defRPr sz="2000" b="1">
-                <a:solidFill>
-                  <a:srgbClr val="333333"/>
-                </a:solidFill>
-              </a:defRPr>
-            </a:pPr>
-            <a:r>
-              <a:t>✓ else Clause</a:t>
-            </a:r>
-          </a:p>
-          <a:p>
-            <a:pPr>
-              <a:spcAft>
-                <a:spcPts val="800"/>
-              </a:spcAft>
-              <a:defRPr sz="2000" b="1">
-                <a:solidFill>
-                  <a:srgbClr val="333333"/>
-                </a:solidFill>
-              </a:defRPr>
-            </a:pPr>
-            <a:r>
-              <a:t>Runs when no error occurs</a:t>
-            </a:r>
-          </a:p>
-          <a:p>
-            <a:pPr>
-              <a:spcAft>
-                <a:spcPts val="800"/>
-              </a:spcAft>
-              <a:defRPr sz="2000" b="1">
-                <a:solidFill>
-                  <a:srgbClr val="333333"/>
-                </a:solidFill>
-              </a:defRPr>
-            </a:pPr>
-            <a:r>
-              <a:t>✓ finally Clause</a:t>
-            </a:r>
-          </a:p>
-          <a:p>
-            <a:pPr>
-              <a:spcAft>
-                <a:spcPts val="800"/>
-              </a:spcAft>
-              <a:defRPr sz="2000" b="1">
-                <a:solidFill>
-                  <a:srgbClr val="333333"/>
-                </a:solidFill>
-              </a:defRPr>
-            </a:pPr>
-            <a:r>
-              <a:t>Always runs for cleanup</a:t>
-            </a:r>
-          </a:p>
-          <a:p>
-            <a:pPr>
-              <a:spcAft>
-                <a:spcPts val="800"/>
-              </a:spcAft>
-              <a:defRPr sz="2000" b="1">
-                <a:solidFill>
-                  <a:srgbClr val="333333"/>
-                </a:solidFill>
-              </a:defRPr>
-            </a:pPr>
-            <a:r>
-              <a:t>✓ Raising Exceptions</a:t>
-            </a:r>
-          </a:p>
-          <a:p>
-            <a:pPr>
-              <a:spcAft>
-                <a:spcPts val="800"/>
-              </a:spcAft>
-              <a:defRPr sz="2000" b="1">
-                <a:solidFill>
-                  <a:srgbClr val="333333"/>
-                </a:solidFill>
-              </a:defRPr>
-            </a:pPr>
-            <a:r>
-              <a:t>Signal problems in your code</a:t>
+                <a:spcPts val="600"/>
+              </a:spcAft>
+              <a:defRPr b="1" sz="2000">
+                <a:solidFill>
+                  <a:srgbClr val="333333"/>
+                </a:solidFill>
+              </a:defRPr>
+            </a:pPr>
+            <a:r>
+              <a:t>ValueError:</a:t>
+            </a:r>
+          </a:p>
+          <a:p>
+            <a:pPr lvl="1">
+              <a:spcAft>
+                <a:spcPts val="400"/>
+              </a:spcAft>
+              <a:defRPr sz="1600">
+                <a:solidFill>
+                  <a:srgbClr val="333333"/>
+                </a:solidFill>
+              </a:defRPr>
+            </a:pPr>
+            <a:r>
+              <a:t>• Invalid type conversion</a:t>
+            </a:r>
+          </a:p>
+          <a:p>
+            <a:pPr lvl="1">
+              <a:spcAft>
+                <a:spcPts val="400"/>
+              </a:spcAft>
+              <a:defRPr sz="1600">
+                <a:solidFill>
+                  <a:srgbClr val="333333"/>
+                </a:solidFill>
+              </a:defRPr>
+            </a:pPr>
+            <a:r>
+              <a:t>• int("abc")</a:t>
+            </a:r>
+          </a:p>
+          <a:p>
+            <a:pPr>
+              <a:spcAft>
+                <a:spcPts val="600"/>
+              </a:spcAft>
+              <a:defRPr b="1" sz="2000">
+                <a:solidFill>
+                  <a:srgbClr val="333333"/>
+                </a:solidFill>
+              </a:defRPr>
+            </a:pPr>
+            <a:r>
+              <a:t>ZeroDivisionError:</a:t>
+            </a:r>
+          </a:p>
+          <a:p>
+            <a:pPr lvl="1">
+              <a:spcAft>
+                <a:spcPts val="400"/>
+              </a:spcAft>
+              <a:defRPr sz="1600">
+                <a:solidFill>
+                  <a:srgbClr val="333333"/>
+                </a:solidFill>
+              </a:defRPr>
+            </a:pPr>
+            <a:r>
+              <a:t>• Division by zero</a:t>
+            </a:r>
+          </a:p>
+          <a:p>
+            <a:pPr lvl="1">
+              <a:spcAft>
+                <a:spcPts val="400"/>
+              </a:spcAft>
+              <a:defRPr sz="1600">
+                <a:solidFill>
+                  <a:srgbClr val="333333"/>
+                </a:solidFill>
+              </a:defRPr>
+            </a:pPr>
+            <a:r>
+              <a:t>• 10 / 0</a:t>
+            </a:r>
+          </a:p>
+          <a:p>
+            <a:pPr>
+              <a:spcAft>
+                <a:spcPts val="600"/>
+              </a:spcAft>
+              <a:defRPr b="1" sz="2000">
+                <a:solidFill>
+                  <a:srgbClr val="333333"/>
+                </a:solidFill>
+              </a:defRPr>
+            </a:pPr>
+            <a:r>
+              <a:t>TypeError:</a:t>
+            </a:r>
+          </a:p>
+          <a:p>
+            <a:pPr lvl="1">
+              <a:spcAft>
+                <a:spcPts val="400"/>
+              </a:spcAft>
+              <a:defRPr sz="1600">
+                <a:solidFill>
+                  <a:srgbClr val="333333"/>
+                </a:solidFill>
+              </a:defRPr>
+            </a:pPr>
+            <a:r>
+              <a:t>• Wrong type operation</a:t>
+            </a:r>
+          </a:p>
+          <a:p>
+            <a:pPr lvl="1">
+              <a:spcAft>
+                <a:spcPts val="400"/>
+              </a:spcAft>
+              <a:defRPr sz="1600">
+                <a:solidFill>
+                  <a:srgbClr val="333333"/>
+                </a:solidFill>
+              </a:defRPr>
+            </a:pPr>
+            <a:r>
+              <a:t>• "hello" + 5</a:t>
+            </a:r>
+          </a:p>
+          <a:p>
+            <a:pPr>
+              <a:spcAft>
+                <a:spcPts val="600"/>
+              </a:spcAft>
+              <a:defRPr b="1" sz="2000">
+                <a:solidFill>
+                  <a:srgbClr val="333333"/>
+                </a:solidFill>
+              </a:defRPr>
+            </a:pPr>
+            <a:r>
+              <a:t>IndexError:</a:t>
+            </a:r>
+          </a:p>
+          <a:p>
+            <a:pPr lvl="1">
+              <a:spcAft>
+                <a:spcPts val="400"/>
+              </a:spcAft>
+              <a:defRPr sz="1600">
+                <a:solidFill>
+                  <a:srgbClr val="333333"/>
+                </a:solidFill>
+              </a:defRPr>
+            </a:pPr>
+            <a:r>
+              <a:t>• Invalid list index</a:t>
+            </a:r>
+          </a:p>
+          <a:p>
+            <a:pPr lvl="1">
+              <a:spcAft>
+                <a:spcPts val="400"/>
+              </a:spcAft>
+              <a:defRPr sz="1600">
+                <a:solidFill>
+                  <a:srgbClr val="333333"/>
+                </a:solidFill>
+              </a:defRPr>
+            </a:pPr>
+            <a:r>
+              <a:t>• [1, 2][5]</a:t>
+            </a:r>
+          </a:p>
+          <a:p>
+            <a:pPr>
+              <a:spcAft>
+                <a:spcPts val="600"/>
+              </a:spcAft>
+              <a:defRPr b="1" sz="2000">
+                <a:solidFill>
+                  <a:srgbClr val="333333"/>
+                </a:solidFill>
+              </a:defRPr>
+            </a:pPr>
+            <a:r>
+              <a:t>KeyError:</a:t>
+            </a:r>
+          </a:p>
+          <a:p>
+            <a:pPr lvl="1">
+              <a:spcAft>
+                <a:spcPts val="400"/>
+              </a:spcAft>
+              <a:defRPr sz="1600">
+                <a:solidFill>
+                  <a:srgbClr val="333333"/>
+                </a:solidFill>
+              </a:defRPr>
+            </a:pPr>
+            <a:r>
+              <a:t>• Invalid dict key</a:t>
+            </a:r>
+          </a:p>
+          <a:p>
+            <a:pPr lvl="1">
+              <a:spcAft>
+                <a:spcPts val="400"/>
+              </a:spcAft>
+              <a:defRPr sz="1600">
+                <a:solidFill>
+                  <a:srgbClr val="333333"/>
+                </a:solidFill>
+              </a:defRPr>
+            </a:pPr>
+            <a:r>
+              <a:t>• {"a": 1}["b"]</a:t>
+            </a:r>
+          </a:p>
+          <a:p>
+            <a:pPr>
+              <a:spcAft>
+                <a:spcPts val="600"/>
+              </a:spcAft>
+              <a:defRPr b="1" sz="2000">
+                <a:solidFill>
+                  <a:srgbClr val="333333"/>
+                </a:solidFill>
+              </a:defRPr>
+            </a:pPr>
+            <a:r>
+              <a:t>FileNotFoundError:</a:t>
+            </a:r>
+          </a:p>
+          <a:p>
+            <a:pPr lvl="1">
+              <a:spcAft>
+                <a:spcPts val="400"/>
+              </a:spcAft>
+              <a:defRPr sz="1600">
+                <a:solidFill>
+                  <a:srgbClr val="333333"/>
+                </a:solidFill>
+              </a:defRPr>
+            </a:pPr>
+            <a:r>
+              <a:t>• File doesn't exist</a:t>
+            </a:r>
+          </a:p>
+          <a:p>
+            <a:pPr>
+              <a:spcAft>
+                <a:spcPts val="600"/>
+              </a:spcAft>
+              <a:defRPr b="1" sz="2000">
+                <a:solidFill>
+                  <a:srgbClr val="333333"/>
+                </a:solidFill>
+              </a:defRPr>
+            </a:pPr>
+            <a:r>
+              <a:t>AttributeError:</a:t>
+            </a:r>
+          </a:p>
+          <a:p>
+            <a:pPr lvl="1">
+              <a:spcAft>
+                <a:spcPts val="400"/>
+              </a:spcAft>
+              <a:defRPr sz="1600">
+                <a:solidFill>
+                  <a:srgbClr val="333333"/>
+                </a:solidFill>
+              </a:defRPr>
+            </a:pPr>
+            <a:r>
+              <a:t>• Invalid attribute access</a:t>
             </a:r>
           </a:p>
         </p:txBody>
@@ -4602,173 +5052,7 @@
 </p:sld>
 </file>
 
-<file path=ppt/slides/slide14.xml><?xml version="1.0" encoding="utf-8"?>
-<p:sld xmlns:a="http://schemas.openxmlformats.org/drawingml/2006/main" xmlns:p="http://schemas.openxmlformats.org/presentationml/2006/main" xmlns:r="http://schemas.openxmlformats.org/officeDocument/2006/relationships">
-  <p:cSld>
-    <p:spTree>
-      <p:nvGrpSpPr>
-        <p:cNvPr id="1" name=""/>
-        <p:cNvGrpSpPr/>
-        <p:nvPr/>
-      </p:nvGrpSpPr>
-      <p:grpSpPr/>
-      <p:sp>
-        <p:nvSpPr>
-          <p:cNvPr id="2" name="Rectangle 1"/>
-          <p:cNvSpPr/>
-          <p:nvPr/>
-        </p:nvSpPr>
-        <p:spPr>
-          <a:xfrm>
-            <a:off x="0" y="0"/>
-            <a:ext cx="12191695" cy="6858000"/>
-          </a:xfrm>
-          <a:prstGeom prst="rect">
-            <a:avLst/>
-          </a:prstGeom>
-          <a:solidFill>
-            <a:srgbClr val="F0F8FF"/>
-          </a:solidFill>
-          <a:ln>
-            <a:noFill/>
-          </a:ln>
-        </p:spPr>
-        <p:style>
-          <a:lnRef idx="1">
-            <a:schemeClr val="accent1"/>
-          </a:lnRef>
-          <a:fillRef idx="3">
-            <a:schemeClr val="accent1"/>
-          </a:fillRef>
-          <a:effectRef idx="2">
-            <a:schemeClr val="accent1"/>
-          </a:effectRef>
-          <a:fontRef idx="minor">
-            <a:schemeClr val="lt1"/>
-          </a:fontRef>
-        </p:style>
-        <p:txBody>
-          <a:bodyPr rtlCol="0" anchor="ctr"/>
-          <a:lstStyle/>
-          <a:p>
-            <a:pPr algn="ctr"/>
-          </a:p>
-        </p:txBody>
-      </p:sp>
-      <p:sp>
-        <p:nvSpPr>
-          <p:cNvPr id="3" name="TextBox 2"/>
-          <p:cNvSpPr txBox="1"/>
-          <p:nvPr/>
-        </p:nvSpPr>
-        <p:spPr>
-          <a:xfrm>
-            <a:off x="914400" y="1828800"/>
-            <a:ext cx="10360152" cy="1371600"/>
-          </a:xfrm>
-          <a:prstGeom prst="rect">
-            <a:avLst/>
-          </a:prstGeom>
-          <a:noFill/>
-        </p:spPr>
-        <p:txBody>
-          <a:bodyPr wrap="none">
-            <a:spAutoFit/>
-          </a:bodyPr>
-          <a:lstStyle/>
-          <a:p>
-            <a:pPr algn="ctr">
-              <a:defRPr sz="5400" b="1">
-                <a:solidFill>
-                  <a:srgbClr val="003366"/>
-                </a:solidFill>
-              </a:defRPr>
-            </a:pPr>
-            <a:r>
-              <a:t>Ready to Code!</a:t>
-            </a:r>
-          </a:p>
-        </p:txBody>
-      </p:sp>
-      <p:sp>
-        <p:nvSpPr>
-          <p:cNvPr id="4" name="TextBox 3"/>
-          <p:cNvSpPr txBox="1"/>
-          <p:nvPr/>
-        </p:nvSpPr>
-        <p:spPr>
-          <a:xfrm>
-            <a:off x="914400" y="3657600"/>
-            <a:ext cx="10360152" cy="548640"/>
-          </a:xfrm>
-          <a:prstGeom prst="rect">
-            <a:avLst/>
-          </a:prstGeom>
-          <a:noFill/>
-        </p:spPr>
-        <p:txBody>
-          <a:bodyPr wrap="none">
-            <a:spAutoFit/>
-          </a:bodyPr>
-          <a:lstStyle/>
-          <a:p>
-            <a:pPr algn="ctr">
-              <a:defRPr sz="2800">
-                <a:solidFill>
-                  <a:srgbClr val="4682B4"/>
-                </a:solidFill>
-              </a:defRPr>
-            </a:pPr>
-            <a:r>
-              <a:t>Open the practice notebook to master error handling</a:t>
-            </a:r>
-          </a:p>
-        </p:txBody>
-      </p:sp>
-      <p:sp>
-        <p:nvSpPr>
-          <p:cNvPr id="5" name="TextBox 4"/>
-          <p:cNvSpPr txBox="1"/>
-          <p:nvPr/>
-        </p:nvSpPr>
-        <p:spPr>
-          <a:xfrm>
-            <a:off x="914400" y="4297680"/>
-            <a:ext cx="10360152" cy="548640"/>
-          </a:xfrm>
-          <a:prstGeom prst="rect">
-            <a:avLst/>
-          </a:prstGeom>
-          <a:noFill/>
-        </p:spPr>
-        <p:txBody>
-          <a:bodyPr wrap="none">
-            <a:spAutoFit/>
-          </a:bodyPr>
-          <a:lstStyle/>
-          <a:p>
-            <a:pPr algn="ctr">
-              <a:defRPr sz="2800">
-                <a:solidFill>
-                  <a:srgbClr val="4682B4"/>
-                </a:solidFill>
-              </a:defRPr>
-            </a:pPr>
-            <a:r>
-              <a:t>Build robust, professional programs!</a:t>
-            </a:r>
-          </a:p>
-        </p:txBody>
-      </p:sp>
-    </p:spTree>
-  </p:cSld>
-  <p:clrMapOvr>
-    <a:masterClrMapping/>
-  </p:clrMapOvr>
-</p:sld>
-</file>
-
-<file path=ppt/slides/slide2.xml><?xml version="1.0" encoding="utf-8"?>
+<file path=ppt/slides/slide4.xml><?xml version="1.0" encoding="utf-8"?>
 <p:sld xmlns:a="http://schemas.openxmlformats.org/drawingml/2006/main" xmlns:p="http://schemas.openxmlformats.org/presentationml/2006/main" xmlns:r="http://schemas.openxmlformats.org/officeDocument/2006/relationships">
   <p:cSld>
     <p:spTree>
@@ -4872,8 +5156,8 @@
         </p:nvSpPr>
         <p:spPr>
           <a:xfrm>
-            <a:off x="457200" y="365760"/>
-            <a:ext cx="10972800" cy="731520"/>
+            <a:off x="457200" y="320040"/>
+            <a:ext cx="10972800" cy="640080"/>
           </a:xfrm>
           <a:prstGeom prst="rect">
             <a:avLst/>
@@ -4887,71 +5171,28 @@
           <a:lstStyle/>
           <a:p>
             <a:pPr>
-              <a:defRPr sz="4000" b="1">
+              <a:defRPr sz="3600" b="1">
                 <a:solidFill>
                   <a:srgbClr val="003366"/>
                 </a:solidFill>
               </a:defRPr>
             </a:pPr>
             <a:r>
-              <a:t>Why Error Handling Matters</a:t>
-            </a:r>
-          </a:p>
-        </p:txBody>
-      </p:sp>
-      <p:sp>
-        <p:nvSpPr>
-          <p:cNvPr id="5" name="Rectangle 4"/>
-          <p:cNvSpPr/>
+              <a:t>Try-Except Blocks</a:t>
+            </a:r>
+          </a:p>
+        </p:txBody>
+      </p:sp>
+      <p:sp>
+        <p:nvSpPr>
+          <p:cNvPr id="5" name="TextBox 4"/>
+          <p:cNvSpPr txBox="1"/>
           <p:nvPr/>
         </p:nvSpPr>
         <p:spPr>
           <a:xfrm>
-            <a:off x="457200" y="1005840"/>
-            <a:ext cx="1828800" cy="45720"/>
-          </a:xfrm>
-          <a:prstGeom prst="rect">
-            <a:avLst/>
-          </a:prstGeom>
-          <a:solidFill>
-            <a:srgbClr val="0066CC"/>
-          </a:solidFill>
-          <a:ln>
-            <a:noFill/>
-          </a:ln>
-        </p:spPr>
-        <p:style>
-          <a:lnRef idx="1">
-            <a:schemeClr val="accent1"/>
-          </a:lnRef>
-          <a:fillRef idx="3">
-            <a:schemeClr val="accent1"/>
-          </a:fillRef>
-          <a:effectRef idx="2">
-            <a:schemeClr val="accent1"/>
-          </a:effectRef>
-          <a:fontRef idx="minor">
-            <a:schemeClr val="lt1"/>
-          </a:fontRef>
-        </p:style>
-        <p:txBody>
-          <a:bodyPr rtlCol="0" anchor="ctr"/>
-          <a:lstStyle/>
-          <a:p>
-            <a:pPr algn="ctr"/>
-          </a:p>
-        </p:txBody>
-      </p:sp>
-      <p:sp>
-        <p:nvSpPr>
-          <p:cNvPr id="6" name="TextBox 5"/>
-          <p:cNvSpPr txBox="1"/>
-          <p:nvPr/>
-        </p:nvSpPr>
-        <p:spPr>
-          <a:xfrm>
-            <a:off x="640080" y="1371600"/>
-            <a:ext cx="10789920" cy="4572000"/>
+            <a:off x="640080" y="1188720"/>
+            <a:ext cx="10789920" cy="5303520"/>
           </a:xfrm>
           <a:prstGeom prst="rect">
             <a:avLst/>
@@ -4966,151 +5207,256 @@
           <a:p>
             <a:pPr>
               <a:spcAft>
-                <a:spcPts val="800"/>
-              </a:spcAft>
-              <a:defRPr sz="2000" b="1">
-                <a:solidFill>
-                  <a:srgbClr val="333333"/>
-                </a:solidFill>
-              </a:defRPr>
-            </a:pPr>
-            <a:r>
-              <a:t>Errors areinevitable- but crashes areoptional!</a:t>
-            </a:r>
-          </a:p>
-          <a:p>
-            <a:pPr>
-              <a:spcAft>
-                <a:spcPts val="800"/>
-              </a:spcAft>
-              <a:defRPr sz="2000" b="1">
-                <a:solidFill>
-                  <a:srgbClr val="333333"/>
-                </a:solidFill>
-              </a:defRPr>
-            </a:pPr>
-            <a:r>
-              <a:t>Without Error Handling:</a:t>
-            </a:r>
-          </a:p>
-          <a:p>
-            <a:pPr>
-              <a:spcAft>
-                <a:spcPts val="800"/>
-              </a:spcAft>
-              <a:defRPr sz="2000" b="1">
-                <a:solidFill>
-                  <a:srgbClr val="333333"/>
-                </a:solidFill>
-              </a:defRPr>
-            </a:pPr>
-            <a:r>
-              <a:t>With Error Handling:</a:t>
-            </a:r>
-          </a:p>
-          <a:p>
-            <a:pPr>
-              <a:spcAft>
-                <a:spcPts val="800"/>
-              </a:spcAft>
-              <a:defRPr sz="2000" b="1">
-                <a:solidFill>
-                  <a:srgbClr val="333333"/>
-                </a:solidFill>
-              </a:defRPr>
-            </a:pPr>
-            <a:r>
-              <a:t>Common Errors You've Seen:</a:t>
-            </a:r>
-          </a:p>
-          <a:p>
-            <a:pPr lvl="1">
-              <a:spcAft>
-                <a:spcPts val="800"/>
-              </a:spcAft>
-              <a:defRPr sz="1800">
-                <a:solidFill>
-                  <a:srgbClr val="333333"/>
-                </a:solidFill>
-              </a:defRPr>
-            </a:pPr>
-            <a:r>
-              <a:t>• ❌ Programs crash unexpectedly</a:t>
-            </a:r>
-          </a:p>
-          <a:p>
-            <a:pPr lvl="1">
-              <a:spcAft>
-                <a:spcPts val="800"/>
-              </a:spcAft>
-              <a:defRPr sz="1800">
-                <a:solidFill>
-                  <a:srgbClr val="333333"/>
-                </a:solidFill>
-              </a:defRPr>
-            </a:pPr>
-            <a:r>
-              <a:t>• ❌ Users see scary error messages</a:t>
-            </a:r>
-          </a:p>
-          <a:p>
-            <a:pPr lvl="1">
-              <a:spcAft>
-                <a:spcPts val="800"/>
-              </a:spcAft>
-              <a:defRPr sz="1800">
-                <a:solidFill>
-                  <a:srgbClr val="333333"/>
-                </a:solidFill>
-              </a:defRPr>
-            </a:pPr>
-            <a:r>
-              <a:t>• ❌ Data might be lost</a:t>
-            </a:r>
-          </a:p>
-          <a:p>
-            <a:pPr lvl="1">
-              <a:spcAft>
-                <a:spcPts val="800"/>
-              </a:spcAft>
-              <a:defRPr sz="1800">
-                <a:solidFill>
-                  <a:srgbClr val="333333"/>
-                </a:solidFill>
-              </a:defRPr>
-            </a:pPr>
-            <a:r>
-              <a:t>• ❌ No way to recover</a:t>
-            </a:r>
-          </a:p>
-          <a:p>
-            <a:pPr lvl="1">
-              <a:spcAft>
-                <a:spcPts val="800"/>
-              </a:spcAft>
-              <a:defRPr sz="1800">
-                <a:solidFill>
-                  <a:srgbClr val="333333"/>
-                </a:solidFill>
-              </a:defRPr>
-            </a:pPr>
-            <a:r>
-              <a:t>• ✓ Programs handle problems gracefully</a:t>
-            </a:r>
-          </a:p>
-          <a:p>
-            <a:pPr lvl="1">
-              <a:spcAft>
-                <a:spcPts val="800"/>
-              </a:spcAft>
-              <a:defRPr sz="1800">
-                <a:solidFill>
-                  <a:srgbClr val="333333"/>
-                </a:solidFill>
-              </a:defRPr>
-            </a:pPr>
-            <a:r>
-              <a:t>• ✓ Users see helpful messages</a:t>
+                <a:spcPts val="600"/>
+              </a:spcAft>
+              <a:defRPr b="1" sz="2000">
+                <a:solidFill>
+                  <a:srgbClr val="333333"/>
+                </a:solidFill>
+              </a:defRPr>
+            </a:pPr>
+            <a:r>
+              <a:t>Basic Syntax:</a:t>
+            </a:r>
+          </a:p>
+          <a:p>
+            <a:pPr>
+              <a:spcAft>
+                <a:spcPts val="600"/>
+              </a:spcAft>
+              <a:defRPr b="1" sz="2000">
+                <a:solidFill>
+                  <a:srgbClr val="333333"/>
+                </a:solidFill>
+              </a:defRPr>
+            </a:pPr>
+            <a:r>
+              <a:t>try:</a:t>
+            </a:r>
+          </a:p>
+          <a:p>
+            <a:pPr>
+              <a:spcAft>
+                <a:spcPts val="600"/>
+              </a:spcAft>
+              <a:defRPr sz="1600">
+                <a:solidFill>
+                  <a:srgbClr val="333333"/>
+                </a:solidFill>
+              </a:defRPr>
+            </a:pPr>
+            <a:r>
+              <a:t>    # Code that might raise exception</a:t>
+            </a:r>
+          </a:p>
+          <a:p>
+            <a:pPr>
+              <a:spcAft>
+                <a:spcPts val="600"/>
+              </a:spcAft>
+              <a:defRPr sz="1600">
+                <a:solidFill>
+                  <a:srgbClr val="333333"/>
+                </a:solidFill>
+              </a:defRPr>
+            </a:pPr>
+            <a:r>
+              <a:t>    age = int(input("Age: "))</a:t>
+            </a:r>
+          </a:p>
+          <a:p>
+            <a:pPr>
+              <a:spcAft>
+                <a:spcPts val="600"/>
+              </a:spcAft>
+              <a:defRPr b="1" sz="2000">
+                <a:solidFill>
+                  <a:srgbClr val="333333"/>
+                </a:solidFill>
+              </a:defRPr>
+            </a:pPr>
+            <a:r>
+              <a:t>except ValueError:</a:t>
+            </a:r>
+          </a:p>
+          <a:p>
+            <a:pPr>
+              <a:spcAft>
+                <a:spcPts val="600"/>
+              </a:spcAft>
+              <a:defRPr sz="1600">
+                <a:solidFill>
+                  <a:srgbClr val="333333"/>
+                </a:solidFill>
+              </a:defRPr>
+            </a:pPr>
+            <a:r>
+              <a:t>    # Handle the error</a:t>
+            </a:r>
+          </a:p>
+          <a:p>
+            <a:pPr>
+              <a:spcAft>
+                <a:spcPts val="600"/>
+              </a:spcAft>
+              <a:defRPr sz="1600">
+                <a:solidFill>
+                  <a:srgbClr val="333333"/>
+                </a:solidFill>
+              </a:defRPr>
+            </a:pPr>
+            <a:r>
+              <a:t>    print("Please enter a number")</a:t>
+            </a:r>
+          </a:p>
+          <a:p>
+            <a:pPr>
+              <a:spcAft>
+                <a:spcPts val="600"/>
+              </a:spcAft>
+              <a:defRPr b="1" sz="2000">
+                <a:solidFill>
+                  <a:srgbClr val="333333"/>
+                </a:solidFill>
+              </a:defRPr>
+            </a:pPr>
+            <a:r>
+              <a:t>Multiple Exceptions:</a:t>
+            </a:r>
+          </a:p>
+          <a:p>
+            <a:pPr>
+              <a:spcAft>
+                <a:spcPts val="600"/>
+              </a:spcAft>
+              <a:defRPr b="1" sz="2000">
+                <a:solidFill>
+                  <a:srgbClr val="333333"/>
+                </a:solidFill>
+              </a:defRPr>
+            </a:pPr>
+            <a:r>
+              <a:t>try:</a:t>
+            </a:r>
+          </a:p>
+          <a:p>
+            <a:pPr>
+              <a:spcAft>
+                <a:spcPts val="600"/>
+              </a:spcAft>
+              <a:defRPr sz="1600">
+                <a:solidFill>
+                  <a:srgbClr val="333333"/>
+                </a:solidFill>
+              </a:defRPr>
+            </a:pPr>
+            <a:r>
+              <a:t>    result = 10 / int(input("Number: "))</a:t>
+            </a:r>
+          </a:p>
+          <a:p>
+            <a:pPr>
+              <a:spcAft>
+                <a:spcPts val="600"/>
+              </a:spcAft>
+              <a:defRPr b="1" sz="2000">
+                <a:solidFill>
+                  <a:srgbClr val="333333"/>
+                </a:solidFill>
+              </a:defRPr>
+            </a:pPr>
+            <a:r>
+              <a:t>except ValueError:</a:t>
+            </a:r>
+          </a:p>
+          <a:p>
+            <a:pPr>
+              <a:spcAft>
+                <a:spcPts val="600"/>
+              </a:spcAft>
+              <a:defRPr sz="1600">
+                <a:solidFill>
+                  <a:srgbClr val="333333"/>
+                </a:solidFill>
+              </a:defRPr>
+            </a:pPr>
+            <a:r>
+              <a:t>    print("Invalid number")</a:t>
+            </a:r>
+          </a:p>
+          <a:p>
+            <a:pPr>
+              <a:spcAft>
+                <a:spcPts val="600"/>
+              </a:spcAft>
+              <a:defRPr b="1" sz="2000">
+                <a:solidFill>
+                  <a:srgbClr val="333333"/>
+                </a:solidFill>
+              </a:defRPr>
+            </a:pPr>
+            <a:r>
+              <a:t>except ZeroDivisionError:</a:t>
+            </a:r>
+          </a:p>
+          <a:p>
+            <a:pPr>
+              <a:spcAft>
+                <a:spcPts val="600"/>
+              </a:spcAft>
+              <a:defRPr sz="1600">
+                <a:solidFill>
+                  <a:srgbClr val="333333"/>
+                </a:solidFill>
+              </a:defRPr>
+            </a:pPr>
+            <a:r>
+              <a:t>    print("Cannot divide by zero")</a:t>
+            </a:r>
+          </a:p>
+          <a:p>
+            <a:pPr>
+              <a:spcAft>
+                <a:spcPts val="600"/>
+              </a:spcAft>
+              <a:defRPr b="1" sz="2000">
+                <a:solidFill>
+                  <a:srgbClr val="333333"/>
+                </a:solidFill>
+              </a:defRPr>
+            </a:pPr>
+            <a:r>
+              <a:t>Catch All:</a:t>
+            </a:r>
+          </a:p>
+          <a:p>
+            <a:pPr>
+              <a:spcAft>
+                <a:spcPts val="600"/>
+              </a:spcAft>
+              <a:defRPr b="1" sz="2000">
+                <a:solidFill>
+                  <a:srgbClr val="333333"/>
+                </a:solidFill>
+              </a:defRPr>
+            </a:pPr>
+            <a:r>
+              <a:t>except Exception as e:</a:t>
+            </a:r>
+          </a:p>
+          <a:p>
+            <a:pPr>
+              <a:spcAft>
+                <a:spcPts val="600"/>
+              </a:spcAft>
+              <a:defRPr sz="1600">
+                <a:solidFill>
+                  <a:srgbClr val="333333"/>
+                </a:solidFill>
+              </a:defRPr>
+            </a:pPr>
+            <a:r>
+              <a:t>    print(f"Error: {e}")</a:t>
             </a:r>
           </a:p>
         </p:txBody>
@@ -5123,7 +5469,7 @@
 </p:sld>
 </file>
 
-<file path=ppt/slides/slide3.xml><?xml version="1.0" encoding="utf-8"?>
+<file path=ppt/slides/slide5.xml><?xml version="1.0" encoding="utf-8"?>
 <p:sld xmlns:a="http://schemas.openxmlformats.org/drawingml/2006/main" xmlns:p="http://schemas.openxmlformats.org/presentationml/2006/main" xmlns:r="http://schemas.openxmlformats.org/officeDocument/2006/relationships">
   <p:cSld>
     <p:spTree>
@@ -5227,8 +5573,8 @@
         </p:nvSpPr>
         <p:spPr>
           <a:xfrm>
-            <a:off x="457200" y="365760"/>
-            <a:ext cx="10972800" cy="731520"/>
+            <a:off x="457200" y="320040"/>
+            <a:ext cx="10972800" cy="640080"/>
           </a:xfrm>
           <a:prstGeom prst="rect">
             <a:avLst/>
@@ -5242,71 +5588,28 @@
           <a:lstStyle/>
           <a:p>
             <a:pPr>
-              <a:defRPr sz="4000" b="1">
+              <a:defRPr sz="3600" b="1">
                 <a:solidFill>
                   <a:srgbClr val="003366"/>
                 </a:solidFill>
               </a:defRPr>
             </a:pPr>
             <a:r>
-              <a:t>Common Exception Types</a:t>
-            </a:r>
-          </a:p>
-        </p:txBody>
-      </p:sp>
-      <p:sp>
-        <p:nvSpPr>
-          <p:cNvPr id="5" name="Rectangle 4"/>
-          <p:cNvSpPr/>
+              <a:t>The else and finally Clauses</a:t>
+            </a:r>
+          </a:p>
+        </p:txBody>
+      </p:sp>
+      <p:sp>
+        <p:nvSpPr>
+          <p:cNvPr id="5" name="TextBox 4"/>
+          <p:cNvSpPr txBox="1"/>
           <p:nvPr/>
         </p:nvSpPr>
         <p:spPr>
           <a:xfrm>
-            <a:off x="457200" y="1005840"/>
-            <a:ext cx="1828800" cy="45720"/>
-          </a:xfrm>
-          <a:prstGeom prst="rect">
-            <a:avLst/>
-          </a:prstGeom>
-          <a:solidFill>
-            <a:srgbClr val="0066CC"/>
-          </a:solidFill>
-          <a:ln>
-            <a:noFill/>
-          </a:ln>
-        </p:spPr>
-        <p:style>
-          <a:lnRef idx="1">
-            <a:schemeClr val="accent1"/>
-          </a:lnRef>
-          <a:fillRef idx="3">
-            <a:schemeClr val="accent1"/>
-          </a:fillRef>
-          <a:effectRef idx="2">
-            <a:schemeClr val="accent1"/>
-          </a:effectRef>
-          <a:fontRef idx="minor">
-            <a:schemeClr val="lt1"/>
-          </a:fontRef>
-        </p:style>
-        <p:txBody>
-          <a:bodyPr rtlCol="0" anchor="ctr"/>
-          <a:lstStyle/>
-          <a:p>
-            <a:pPr algn="ctr"/>
-          </a:p>
-        </p:txBody>
-      </p:sp>
-      <p:sp>
-        <p:nvSpPr>
-          <p:cNvPr id="6" name="TextBox 5"/>
-          <p:cNvSpPr txBox="1"/>
-          <p:nvPr/>
-        </p:nvSpPr>
-        <p:spPr>
-          <a:xfrm>
-            <a:off x="640080" y="1371600"/>
-            <a:ext cx="10789920" cy="4572000"/>
+            <a:off x="640080" y="1188720"/>
+            <a:ext cx="10789920" cy="5303520"/>
           </a:xfrm>
           <a:prstGeom prst="rect">
             <a:avLst/>
@@ -5321,151 +5624,271 @@
           <a:p>
             <a:pPr>
               <a:spcAft>
-                <a:spcPts val="800"/>
-              </a:spcAft>
-              <a:defRPr sz="2000" b="1">
-                <a:solidFill>
-                  <a:srgbClr val="333333"/>
-                </a:solidFill>
-              </a:defRPr>
-            </a:pPr>
-            <a:r>
-              <a:t>ValueError</a:t>
-            </a:r>
-          </a:p>
-          <a:p>
-            <a:pPr>
-              <a:spcAft>
-                <a:spcPts val="800"/>
-              </a:spcAft>
-              <a:defRPr sz="2000" b="1">
-                <a:solidFill>
-                  <a:srgbClr val="333333"/>
-                </a:solidFill>
-              </a:defRPr>
-            </a:pPr>
-            <a:r>
-              <a:t>Invalid value for conversion</a:t>
-            </a:r>
-          </a:p>
-          <a:p>
-            <a:pPr>
-              <a:spcAft>
-                <a:spcPts val="800"/>
-              </a:spcAft>
-              <a:defRPr sz="2000" b="1">
-                <a:solidFill>
-                  <a:srgbClr val="333333"/>
-                </a:solidFill>
-              </a:defRPr>
-            </a:pPr>
-            <a:r>
-              <a:t>TypeError</a:t>
-            </a:r>
-          </a:p>
-          <a:p>
-            <a:pPr>
-              <a:spcAft>
-                <a:spcPts val="800"/>
-              </a:spcAft>
-              <a:defRPr sz="2000" b="1">
-                <a:solidFill>
-                  <a:srgbClr val="333333"/>
-                </a:solidFill>
-              </a:defRPr>
-            </a:pPr>
-            <a:r>
-              <a:t>Wrong type for operation</a:t>
-            </a:r>
-          </a:p>
-          <a:p>
-            <a:pPr>
-              <a:spcAft>
-                <a:spcPts val="800"/>
-              </a:spcAft>
-              <a:defRPr sz="2000" b="1">
-                <a:solidFill>
-                  <a:srgbClr val="333333"/>
-                </a:solidFill>
-              </a:defRPr>
-            </a:pPr>
-            <a:r>
-              <a:t>ZeroDivisionError</a:t>
-            </a:r>
-          </a:p>
-          <a:p>
-            <a:pPr>
-              <a:spcAft>
-                <a:spcPts val="800"/>
-              </a:spcAft>
-              <a:defRPr sz="2000" b="1">
-                <a:solidFill>
-                  <a:srgbClr val="333333"/>
-                </a:solidFill>
-              </a:defRPr>
-            </a:pPr>
-            <a:r>
-              <a:t>Division by zero</a:t>
-            </a:r>
-          </a:p>
-          <a:p>
-            <a:pPr>
-              <a:spcAft>
-                <a:spcPts val="800"/>
-              </a:spcAft>
-              <a:defRPr sz="2000" b="1">
-                <a:solidFill>
-                  <a:srgbClr val="333333"/>
-                </a:solidFill>
-              </a:defRPr>
-            </a:pPr>
-            <a:r>
-              <a:t>FileNotFoundError</a:t>
-            </a:r>
-          </a:p>
-          <a:p>
-            <a:pPr>
-              <a:spcAft>
-                <a:spcPts val="800"/>
-              </a:spcAft>
-              <a:defRPr sz="2000" b="1">
-                <a:solidFill>
-                  <a:srgbClr val="333333"/>
-                </a:solidFill>
-              </a:defRPr>
-            </a:pPr>
-            <a:r>
-              <a:t>File doesn't exist</a:t>
-            </a:r>
-          </a:p>
-          <a:p>
-            <a:pPr>
-              <a:spcAft>
-                <a:spcPts val="800"/>
-              </a:spcAft>
-              <a:defRPr sz="2000" b="1">
-                <a:solidFill>
-                  <a:srgbClr val="333333"/>
-                </a:solidFill>
-              </a:defRPr>
-            </a:pPr>
-            <a:r>
-              <a:t>IndexError</a:t>
-            </a:r>
-          </a:p>
-          <a:p>
-            <a:pPr>
-              <a:spcAft>
-                <a:spcPts val="800"/>
-              </a:spcAft>
-              <a:defRPr sz="2000" b="1">
-                <a:solidFill>
-                  <a:srgbClr val="333333"/>
-                </a:solidFill>
-              </a:defRPr>
-            </a:pPr>
-            <a:r>
-              <a:t>List index out of range</a:t>
+                <a:spcPts val="600"/>
+              </a:spcAft>
+              <a:defRPr b="1" sz="2000">
+                <a:solidFill>
+                  <a:srgbClr val="333333"/>
+                </a:solidFill>
+              </a:defRPr>
+            </a:pPr>
+            <a:r>
+              <a:t>else Clause:</a:t>
+            </a:r>
+          </a:p>
+          <a:p>
+            <a:pPr lvl="1">
+              <a:spcAft>
+                <a:spcPts val="400"/>
+              </a:spcAft>
+              <a:defRPr sz="1600">
+                <a:solidFill>
+                  <a:srgbClr val="333333"/>
+                </a:solidFill>
+              </a:defRPr>
+            </a:pPr>
+            <a:r>
+              <a:t>• Runs if no exception occurred</a:t>
+            </a:r>
+          </a:p>
+          <a:p>
+            <a:pPr>
+              <a:spcAft>
+                <a:spcPts val="600"/>
+              </a:spcAft>
+              <a:defRPr b="1" sz="2000">
+                <a:solidFill>
+                  <a:srgbClr val="333333"/>
+                </a:solidFill>
+              </a:defRPr>
+            </a:pPr>
+            <a:r>
+              <a:t>try:</a:t>
+            </a:r>
+          </a:p>
+          <a:p>
+            <a:pPr>
+              <a:spcAft>
+                <a:spcPts val="600"/>
+              </a:spcAft>
+              <a:defRPr sz="1600">
+                <a:solidFill>
+                  <a:srgbClr val="333333"/>
+                </a:solidFill>
+              </a:defRPr>
+            </a:pPr>
+            <a:r>
+              <a:t>    age = int(input("Age: "))</a:t>
+            </a:r>
+          </a:p>
+          <a:p>
+            <a:pPr>
+              <a:spcAft>
+                <a:spcPts val="600"/>
+              </a:spcAft>
+              <a:defRPr b="1" sz="2000">
+                <a:solidFill>
+                  <a:srgbClr val="333333"/>
+                </a:solidFill>
+              </a:defRPr>
+            </a:pPr>
+            <a:r>
+              <a:t>except ValueError:</a:t>
+            </a:r>
+          </a:p>
+          <a:p>
+            <a:pPr>
+              <a:spcAft>
+                <a:spcPts val="600"/>
+              </a:spcAft>
+              <a:defRPr sz="1600">
+                <a:solidFill>
+                  <a:srgbClr val="333333"/>
+                </a:solidFill>
+              </a:defRPr>
+            </a:pPr>
+            <a:r>
+              <a:t>    print("Invalid")</a:t>
+            </a:r>
+          </a:p>
+          <a:p>
+            <a:pPr>
+              <a:spcAft>
+                <a:spcPts val="600"/>
+              </a:spcAft>
+              <a:defRPr b="1" sz="2000">
+                <a:solidFill>
+                  <a:srgbClr val="333333"/>
+                </a:solidFill>
+              </a:defRPr>
+            </a:pPr>
+            <a:r>
+              <a:t>else:</a:t>
+            </a:r>
+          </a:p>
+          <a:p>
+            <a:pPr>
+              <a:spcAft>
+                <a:spcPts val="600"/>
+              </a:spcAft>
+              <a:defRPr sz="1600">
+                <a:solidFill>
+                  <a:srgbClr val="333333"/>
+                </a:solidFill>
+              </a:defRPr>
+            </a:pPr>
+            <a:r>
+              <a:t>    print(f"Valid age: {age}")</a:t>
+            </a:r>
+          </a:p>
+          <a:p>
+            <a:pPr>
+              <a:spcAft>
+                <a:spcPts val="600"/>
+              </a:spcAft>
+              <a:defRPr b="1" sz="2000">
+                <a:solidFill>
+                  <a:srgbClr val="333333"/>
+                </a:solidFill>
+              </a:defRPr>
+            </a:pPr>
+            <a:r>
+              <a:t>finally Clause:</a:t>
+            </a:r>
+          </a:p>
+          <a:p>
+            <a:pPr lvl="1">
+              <a:spcAft>
+                <a:spcPts val="400"/>
+              </a:spcAft>
+              <a:defRPr sz="1600">
+                <a:solidFill>
+                  <a:srgbClr val="333333"/>
+                </a:solidFill>
+              </a:defRPr>
+            </a:pPr>
+            <a:r>
+              <a:t>• Always runs, error or not</a:t>
+            </a:r>
+          </a:p>
+          <a:p>
+            <a:pPr lvl="1">
+              <a:spcAft>
+                <a:spcPts val="400"/>
+              </a:spcAft>
+              <a:defRPr sz="1600">
+                <a:solidFill>
+                  <a:srgbClr val="333333"/>
+                </a:solidFill>
+              </a:defRPr>
+            </a:pPr>
+            <a:r>
+              <a:t>• Used for cleanup</a:t>
+            </a:r>
+          </a:p>
+          <a:p>
+            <a:pPr>
+              <a:spcAft>
+                <a:spcPts val="600"/>
+              </a:spcAft>
+              <a:defRPr b="1" sz="2000">
+                <a:solidFill>
+                  <a:srgbClr val="333333"/>
+                </a:solidFill>
+              </a:defRPr>
+            </a:pPr>
+            <a:r>
+              <a:t>try:</a:t>
+            </a:r>
+          </a:p>
+          <a:p>
+            <a:pPr>
+              <a:spcAft>
+                <a:spcPts val="600"/>
+              </a:spcAft>
+              <a:defRPr sz="1600">
+                <a:solidFill>
+                  <a:srgbClr val="333333"/>
+                </a:solidFill>
+              </a:defRPr>
+            </a:pPr>
+            <a:r>
+              <a:t>    file = open("data.txt")</a:t>
+            </a:r>
+          </a:p>
+          <a:p>
+            <a:pPr>
+              <a:spcAft>
+                <a:spcPts val="600"/>
+              </a:spcAft>
+              <a:defRPr sz="1600">
+                <a:solidFill>
+                  <a:srgbClr val="333333"/>
+                </a:solidFill>
+              </a:defRPr>
+            </a:pPr>
+            <a:r>
+              <a:t>    data = file.read()</a:t>
+            </a:r>
+          </a:p>
+          <a:p>
+            <a:pPr>
+              <a:spcAft>
+                <a:spcPts val="600"/>
+              </a:spcAft>
+              <a:defRPr b="1" sz="2000">
+                <a:solidFill>
+                  <a:srgbClr val="333333"/>
+                </a:solidFill>
+              </a:defRPr>
+            </a:pPr>
+            <a:r>
+              <a:t>except FileNotFoundError:</a:t>
+            </a:r>
+          </a:p>
+          <a:p>
+            <a:pPr>
+              <a:spcAft>
+                <a:spcPts val="600"/>
+              </a:spcAft>
+              <a:defRPr sz="1600">
+                <a:solidFill>
+                  <a:srgbClr val="333333"/>
+                </a:solidFill>
+              </a:defRPr>
+            </a:pPr>
+            <a:r>
+              <a:t>    print("File not found")</a:t>
+            </a:r>
+          </a:p>
+          <a:p>
+            <a:pPr>
+              <a:spcAft>
+                <a:spcPts val="600"/>
+              </a:spcAft>
+              <a:defRPr b="1" sz="2000">
+                <a:solidFill>
+                  <a:srgbClr val="333333"/>
+                </a:solidFill>
+              </a:defRPr>
+            </a:pPr>
+            <a:r>
+              <a:t>finally:</a:t>
+            </a:r>
+          </a:p>
+          <a:p>
+            <a:pPr>
+              <a:spcAft>
+                <a:spcPts val="600"/>
+              </a:spcAft>
+              <a:defRPr sz="1600">
+                <a:solidFill>
+                  <a:srgbClr val="333333"/>
+                </a:solidFill>
+              </a:defRPr>
+            </a:pPr>
+            <a:r>
+              <a:t>    file.close()  # Always closes</a:t>
             </a:r>
           </a:p>
         </p:txBody>
@@ -5478,7 +5901,7 @@
 </p:sld>
 </file>
 
-<file path=ppt/slides/slide4.xml><?xml version="1.0" encoding="utf-8"?>
+<file path=ppt/slides/slide6.xml><?xml version="1.0" encoding="utf-8"?>
 <p:sld xmlns:a="http://schemas.openxmlformats.org/drawingml/2006/main" xmlns:p="http://schemas.openxmlformats.org/presentationml/2006/main" xmlns:r="http://schemas.openxmlformats.org/officeDocument/2006/relationships">
   <p:cSld>
     <p:spTree>
@@ -5582,8 +6005,8 @@
         </p:nvSpPr>
         <p:spPr>
           <a:xfrm>
-            <a:off x="457200" y="365760"/>
-            <a:ext cx="10972800" cy="731520"/>
+            <a:off x="457200" y="320040"/>
+            <a:ext cx="10972800" cy="640080"/>
           </a:xfrm>
           <a:prstGeom prst="rect">
             <a:avLst/>
@@ -5597,71 +6020,28 @@
           <a:lstStyle/>
           <a:p>
             <a:pPr>
-              <a:defRPr sz="4000" b="1">
+              <a:defRPr sz="3600" b="1">
                 <a:solidFill>
                   <a:srgbClr val="003366"/>
                 </a:solidFill>
               </a:defRPr>
             </a:pPr>
             <a:r>
-              <a:t>Try-Except Blocks</a:t>
-            </a:r>
-          </a:p>
-        </p:txBody>
-      </p:sp>
-      <p:sp>
-        <p:nvSpPr>
-          <p:cNvPr id="5" name="Rectangle 4"/>
-          <p:cNvSpPr/>
+              <a:t>Raising Exceptions</a:t>
+            </a:r>
+          </a:p>
+        </p:txBody>
+      </p:sp>
+      <p:sp>
+        <p:nvSpPr>
+          <p:cNvPr id="5" name="TextBox 4"/>
+          <p:cNvSpPr txBox="1"/>
           <p:nvPr/>
         </p:nvSpPr>
         <p:spPr>
           <a:xfrm>
-            <a:off x="457200" y="1005840"/>
-            <a:ext cx="1828800" cy="45720"/>
-          </a:xfrm>
-          <a:prstGeom prst="rect">
-            <a:avLst/>
-          </a:prstGeom>
-          <a:solidFill>
-            <a:srgbClr val="0066CC"/>
-          </a:solidFill>
-          <a:ln>
-            <a:noFill/>
-          </a:ln>
-        </p:spPr>
-        <p:style>
-          <a:lnRef idx="1">
-            <a:schemeClr val="accent1"/>
-          </a:lnRef>
-          <a:fillRef idx="3">
-            <a:schemeClr val="accent1"/>
-          </a:fillRef>
-          <a:effectRef idx="2">
-            <a:schemeClr val="accent1"/>
-          </a:effectRef>
-          <a:fontRef idx="minor">
-            <a:schemeClr val="lt1"/>
-          </a:fontRef>
-        </p:style>
-        <p:txBody>
-          <a:bodyPr rtlCol="0" anchor="ctr"/>
-          <a:lstStyle/>
-          <a:p>
-            <a:pPr algn="ctr"/>
-          </a:p>
-        </p:txBody>
-      </p:sp>
-      <p:sp>
-        <p:nvSpPr>
-          <p:cNvPr id="6" name="TextBox 5"/>
-          <p:cNvSpPr txBox="1"/>
-          <p:nvPr/>
-        </p:nvSpPr>
-        <p:spPr>
-          <a:xfrm>
-            <a:off x="640080" y="1371600"/>
-            <a:ext cx="10789920" cy="4572000"/>
+            <a:off x="640080" y="1188720"/>
+            <a:ext cx="10789920" cy="5303520"/>
           </a:xfrm>
           <a:prstGeom prst="rect">
             <a:avLst/>
@@ -5676,46 +6056,271 @@
           <a:p>
             <a:pPr>
               <a:spcAft>
-                <a:spcPts val="800"/>
-              </a:spcAft>
-              <a:defRPr sz="2000" b="1">
-                <a:solidFill>
-                  <a:srgbClr val="333333"/>
-                </a:solidFill>
-              </a:defRPr>
-            </a:pPr>
-            <a:r>
-              <a:t>Thetry-exceptblock catches errors and handles them gracefully!</a:t>
-            </a:r>
-          </a:p>
-          <a:p>
-            <a:pPr>
-              <a:spcAft>
-                <a:spcPts val="800"/>
-              </a:spcAft>
-              <a:defRPr sz="2000" b="1">
-                <a:solidFill>
-                  <a:srgbClr val="333333"/>
-                </a:solidFill>
-              </a:defRPr>
-            </a:pPr>
-            <a:r>
-              <a:t>Without Try-Except (Crashes):</a:t>
-            </a:r>
-          </a:p>
-          <a:p>
-            <a:pPr>
-              <a:spcAft>
-                <a:spcPts val="800"/>
-              </a:spcAft>
-              <a:defRPr sz="2000" b="1">
-                <a:solidFill>
-                  <a:srgbClr val="333333"/>
-                </a:solidFill>
-              </a:defRPr>
-            </a:pPr>
-            <a:r>
-              <a:t>With Try-Except (Handles Error):</a:t>
+                <a:spcPts val="600"/>
+              </a:spcAft>
+              <a:defRPr b="1" sz="2000">
+                <a:solidFill>
+                  <a:srgbClr val="333333"/>
+                </a:solidFill>
+              </a:defRPr>
+            </a:pPr>
+            <a:r>
+              <a:t>raise Keyword:</a:t>
+            </a:r>
+          </a:p>
+          <a:p>
+            <a:pPr lvl="1">
+              <a:spcAft>
+                <a:spcPts val="400"/>
+              </a:spcAft>
+              <a:defRPr sz="1600">
+                <a:solidFill>
+                  <a:srgbClr val="333333"/>
+                </a:solidFill>
+              </a:defRPr>
+            </a:pPr>
+            <a:r>
+              <a:t>• Trigger exceptions manually</a:t>
+            </a:r>
+          </a:p>
+          <a:p>
+            <a:pPr>
+              <a:spcAft>
+                <a:spcPts val="600"/>
+              </a:spcAft>
+              <a:defRPr b="1" sz="2000">
+                <a:solidFill>
+                  <a:srgbClr val="333333"/>
+                </a:solidFill>
+              </a:defRPr>
+            </a:pPr>
+            <a:r>
+              <a:t>def set_age(age):</a:t>
+            </a:r>
+          </a:p>
+          <a:p>
+            <a:pPr>
+              <a:spcAft>
+                <a:spcPts val="600"/>
+              </a:spcAft>
+              <a:defRPr sz="1600">
+                <a:solidFill>
+                  <a:srgbClr val="333333"/>
+                </a:solidFill>
+              </a:defRPr>
+            </a:pPr>
+            <a:r>
+              <a:t>    if age &lt; 0:</a:t>
+            </a:r>
+          </a:p>
+          <a:p>
+            <a:pPr>
+              <a:spcAft>
+                <a:spcPts val="600"/>
+              </a:spcAft>
+              <a:defRPr sz="1600">
+                <a:solidFill>
+                  <a:srgbClr val="333333"/>
+                </a:solidFill>
+              </a:defRPr>
+            </a:pPr>
+            <a:r>
+              <a:t>        raise ValueError("Age cannot be negative")</a:t>
+            </a:r>
+          </a:p>
+          <a:p>
+            <a:pPr>
+              <a:spcAft>
+                <a:spcPts val="600"/>
+              </a:spcAft>
+              <a:defRPr sz="1600">
+                <a:solidFill>
+                  <a:srgbClr val="333333"/>
+                </a:solidFill>
+              </a:defRPr>
+            </a:pPr>
+            <a:r>
+              <a:t>    if age &gt; 150:</a:t>
+            </a:r>
+          </a:p>
+          <a:p>
+            <a:pPr>
+              <a:spcAft>
+                <a:spcPts val="600"/>
+              </a:spcAft>
+              <a:defRPr sz="1600">
+                <a:solidFill>
+                  <a:srgbClr val="333333"/>
+                </a:solidFill>
+              </a:defRPr>
+            </a:pPr>
+            <a:r>
+              <a:t>        raise ValueError("Age too high")</a:t>
+            </a:r>
+          </a:p>
+          <a:p>
+            <a:pPr>
+              <a:spcAft>
+                <a:spcPts val="600"/>
+              </a:spcAft>
+              <a:defRPr sz="1600">
+                <a:solidFill>
+                  <a:srgbClr val="333333"/>
+                </a:solidFill>
+              </a:defRPr>
+            </a:pPr>
+            <a:r>
+              <a:t>    return age</a:t>
+            </a:r>
+          </a:p>
+          <a:p>
+            <a:pPr>
+              <a:spcAft>
+                <a:spcPts val="600"/>
+              </a:spcAft>
+              <a:defRPr b="1" sz="2000">
+                <a:solidFill>
+                  <a:srgbClr val="333333"/>
+                </a:solidFill>
+              </a:defRPr>
+            </a:pPr>
+            <a:r>
+              <a:t>try:</a:t>
+            </a:r>
+          </a:p>
+          <a:p>
+            <a:pPr>
+              <a:spcAft>
+                <a:spcPts val="600"/>
+              </a:spcAft>
+              <a:defRPr sz="1600">
+                <a:solidFill>
+                  <a:srgbClr val="333333"/>
+                </a:solidFill>
+              </a:defRPr>
+            </a:pPr>
+            <a:r>
+              <a:t>    user_age = set_age(-5)</a:t>
+            </a:r>
+          </a:p>
+          <a:p>
+            <a:pPr>
+              <a:spcAft>
+                <a:spcPts val="600"/>
+              </a:spcAft>
+              <a:defRPr b="1" sz="2000">
+                <a:solidFill>
+                  <a:srgbClr val="333333"/>
+                </a:solidFill>
+              </a:defRPr>
+            </a:pPr>
+            <a:r>
+              <a:t>except ValueError as e:</a:t>
+            </a:r>
+          </a:p>
+          <a:p>
+            <a:pPr>
+              <a:spcAft>
+                <a:spcPts val="600"/>
+              </a:spcAft>
+              <a:defRPr sz="1600">
+                <a:solidFill>
+                  <a:srgbClr val="333333"/>
+                </a:solidFill>
+              </a:defRPr>
+            </a:pPr>
+            <a:r>
+              <a:t>    print(f"Error: {e}")</a:t>
+            </a:r>
+          </a:p>
+          <a:p>
+            <a:pPr>
+              <a:spcAft>
+                <a:spcPts val="600"/>
+              </a:spcAft>
+              <a:defRPr b="1" sz="2000">
+                <a:solidFill>
+                  <a:srgbClr val="333333"/>
+                </a:solidFill>
+              </a:defRPr>
+            </a:pPr>
+            <a:r>
+              <a:t>Re-raising:</a:t>
+            </a:r>
+          </a:p>
+          <a:p>
+            <a:pPr>
+              <a:spcAft>
+                <a:spcPts val="600"/>
+              </a:spcAft>
+              <a:defRPr b="1" sz="2000">
+                <a:solidFill>
+                  <a:srgbClr val="333333"/>
+                </a:solidFill>
+              </a:defRPr>
+            </a:pPr>
+            <a:r>
+              <a:t>try:</a:t>
+            </a:r>
+          </a:p>
+          <a:p>
+            <a:pPr>
+              <a:spcAft>
+                <a:spcPts val="600"/>
+              </a:spcAft>
+              <a:defRPr sz="1600">
+                <a:solidFill>
+                  <a:srgbClr val="333333"/>
+                </a:solidFill>
+              </a:defRPr>
+            </a:pPr>
+            <a:r>
+              <a:t>    risky_operation()</a:t>
+            </a:r>
+          </a:p>
+          <a:p>
+            <a:pPr>
+              <a:spcAft>
+                <a:spcPts val="600"/>
+              </a:spcAft>
+              <a:defRPr b="1" sz="2000">
+                <a:solidFill>
+                  <a:srgbClr val="333333"/>
+                </a:solidFill>
+              </a:defRPr>
+            </a:pPr>
+            <a:r>
+              <a:t>except Exception:</a:t>
+            </a:r>
+          </a:p>
+          <a:p>
+            <a:pPr>
+              <a:spcAft>
+                <a:spcPts val="600"/>
+              </a:spcAft>
+              <a:defRPr sz="1600">
+                <a:solidFill>
+                  <a:srgbClr val="333333"/>
+                </a:solidFill>
+              </a:defRPr>
+            </a:pPr>
+            <a:r>
+              <a:t>    log_error()</a:t>
+            </a:r>
+          </a:p>
+          <a:p>
+            <a:pPr>
+              <a:spcAft>
+                <a:spcPts val="600"/>
+              </a:spcAft>
+              <a:defRPr sz="1600">
+                <a:solidFill>
+                  <a:srgbClr val="333333"/>
+                </a:solidFill>
+              </a:defRPr>
+            </a:pPr>
+            <a:r>
+              <a:t>    raise  # Re-raise same exception</a:t>
             </a:r>
           </a:p>
         </p:txBody>
@@ -5728,7 +6333,7 @@
 </p:sld>
 </file>
 
-<file path=ppt/slides/slide5.xml><?xml version="1.0" encoding="utf-8"?>
+<file path=ppt/slides/slide7.xml><?xml version="1.0" encoding="utf-8"?>
 <p:sld xmlns:a="http://schemas.openxmlformats.org/drawingml/2006/main" xmlns:p="http://schemas.openxmlformats.org/presentationml/2006/main" xmlns:r="http://schemas.openxmlformats.org/officeDocument/2006/relationships">
   <p:cSld>
     <p:spTree>
@@ -5832,8 +6437,8 @@
         </p:nvSpPr>
         <p:spPr>
           <a:xfrm>
-            <a:off x="457200" y="365760"/>
-            <a:ext cx="10972800" cy="731520"/>
+            <a:off x="457200" y="320040"/>
+            <a:ext cx="10972800" cy="640080"/>
           </a:xfrm>
           <a:prstGeom prst="rect">
             <a:avLst/>
@@ -5847,71 +6452,28 @@
           <a:lstStyle/>
           <a:p>
             <a:pPr>
-              <a:defRPr sz="4000" b="1">
+              <a:defRPr sz="3600" b="1">
                 <a:solidFill>
                   <a:srgbClr val="003366"/>
                 </a:solidFill>
               </a:defRPr>
             </a:pPr>
             <a:r>
-              <a:t>Multiple Except Blocks</a:t>
-            </a:r>
-          </a:p>
-        </p:txBody>
-      </p:sp>
-      <p:sp>
-        <p:nvSpPr>
-          <p:cNvPr id="5" name="Rectangle 4"/>
-          <p:cNvSpPr/>
+              <a:t>Custom Exceptions</a:t>
+            </a:r>
+          </a:p>
+        </p:txBody>
+      </p:sp>
+      <p:sp>
+        <p:nvSpPr>
+          <p:cNvPr id="5" name="TextBox 4"/>
+          <p:cNvSpPr txBox="1"/>
           <p:nvPr/>
         </p:nvSpPr>
         <p:spPr>
           <a:xfrm>
-            <a:off x="457200" y="1005840"/>
-            <a:ext cx="1828800" cy="45720"/>
-          </a:xfrm>
-          <a:prstGeom prst="rect">
-            <a:avLst/>
-          </a:prstGeom>
-          <a:solidFill>
-            <a:srgbClr val="0066CC"/>
-          </a:solidFill>
-          <a:ln>
-            <a:noFill/>
-          </a:ln>
-        </p:spPr>
-        <p:style>
-          <a:lnRef idx="1">
-            <a:schemeClr val="accent1"/>
-          </a:lnRef>
-          <a:fillRef idx="3">
-            <a:schemeClr val="accent1"/>
-          </a:fillRef>
-          <a:effectRef idx="2">
-            <a:schemeClr val="accent1"/>
-          </a:effectRef>
-          <a:fontRef idx="minor">
-            <a:schemeClr val="lt1"/>
-          </a:fontRef>
-        </p:style>
-        <p:txBody>
-          <a:bodyPr rtlCol="0" anchor="ctr"/>
-          <a:lstStyle/>
-          <a:p>
-            <a:pPr algn="ctr"/>
-          </a:p>
-        </p:txBody>
-      </p:sp>
-      <p:sp>
-        <p:nvSpPr>
-          <p:cNvPr id="6" name="TextBox 5"/>
-          <p:cNvSpPr txBox="1"/>
-          <p:nvPr/>
-        </p:nvSpPr>
-        <p:spPr>
-          <a:xfrm>
-            <a:off x="640080" y="1371600"/>
-            <a:ext cx="10789920" cy="4572000"/>
+            <a:off x="640080" y="1188720"/>
+            <a:ext cx="10789920" cy="5303520"/>
           </a:xfrm>
           <a:prstGeom prst="rect">
             <a:avLst/>
@@ -5926,76 +6488,286 @@
           <a:p>
             <a:pPr>
               <a:spcAft>
-                <a:spcPts val="800"/>
-              </a:spcAft>
-              <a:defRPr sz="2000" b="1">
-                <a:solidFill>
-                  <a:srgbClr val="333333"/>
-                </a:solidFill>
-              </a:defRPr>
-            </a:pPr>
-            <a:r>
-              <a:t>Handle different errors differently!</a:t>
-            </a:r>
-          </a:p>
-          <a:p>
-            <a:pPr>
-              <a:spcAft>
-                <a:spcPts val="800"/>
-              </a:spcAft>
-              <a:defRPr sz="2000" b="1">
-                <a:solidFill>
-                  <a:srgbClr val="333333"/>
-                </a:solidFill>
-              </a:defRPr>
-            </a:pPr>
-            <a:r>
-              <a:t>Each Error Gets Custom Message!</a:t>
+                <a:spcPts val="600"/>
+              </a:spcAft>
+              <a:defRPr b="1" sz="2000">
+                <a:solidFill>
+                  <a:srgbClr val="333333"/>
+                </a:solidFill>
+              </a:defRPr>
+            </a:pPr>
+            <a:r>
+              <a:t>Define Your Own:</a:t>
+            </a:r>
+          </a:p>
+          <a:p>
+            <a:pPr>
+              <a:spcAft>
+                <a:spcPts val="600"/>
+              </a:spcAft>
+              <a:defRPr b="1" sz="2000">
+                <a:solidFill>
+                  <a:srgbClr val="333333"/>
+                </a:solidFill>
+              </a:defRPr>
+            </a:pPr>
+            <a:r>
+              <a:t>class InvalidAgeError(Exception):</a:t>
+            </a:r>
+          </a:p>
+          <a:p>
+            <a:pPr>
+              <a:spcAft>
+                <a:spcPts val="600"/>
+              </a:spcAft>
+              <a:defRPr sz="1600">
+                <a:solidFill>
+                  <a:srgbClr val="333333"/>
+                </a:solidFill>
+              </a:defRPr>
+            </a:pPr>
+            <a:r>
+              <a:t>    pass</a:t>
+            </a:r>
+          </a:p>
+          <a:p>
+            <a:pPr>
+              <a:spcAft>
+                <a:spcPts val="600"/>
+              </a:spcAft>
+              <a:defRPr b="1" sz="2000">
+                <a:solidFill>
+                  <a:srgbClr val="333333"/>
+                </a:solidFill>
+              </a:defRPr>
+            </a:pPr>
+            <a:r>
+              <a:t>class NegativeValueError(Exception):</a:t>
+            </a:r>
+          </a:p>
+          <a:p>
+            <a:pPr>
+              <a:spcAft>
+                <a:spcPts val="600"/>
+              </a:spcAft>
+              <a:defRPr sz="1600">
+                <a:solidFill>
+                  <a:srgbClr val="333333"/>
+                </a:solidFill>
+              </a:defRPr>
+            </a:pPr>
+            <a:r>
+              <a:t>    def __init__(self, value):</a:t>
+            </a:r>
+          </a:p>
+          <a:p>
+            <a:pPr>
+              <a:spcAft>
+                <a:spcPts val="600"/>
+              </a:spcAft>
+              <a:defRPr sz="1600">
+                <a:solidFill>
+                  <a:srgbClr val="333333"/>
+                </a:solidFill>
+              </a:defRPr>
+            </a:pPr>
+            <a:r>
+              <a:t>        self.value = value</a:t>
+            </a:r>
+          </a:p>
+          <a:p>
+            <a:pPr>
+              <a:spcAft>
+                <a:spcPts val="600"/>
+              </a:spcAft>
+              <a:defRPr sz="1600">
+                <a:solidFill>
+                  <a:srgbClr val="333333"/>
+                </a:solidFill>
+              </a:defRPr>
+            </a:pPr>
+            <a:r>
+              <a:t>        super().__init__(f"Negative: {value}")</a:t>
+            </a:r>
+          </a:p>
+          <a:p>
+            <a:pPr>
+              <a:spcAft>
+                <a:spcPts val="600"/>
+              </a:spcAft>
+              <a:defRPr b="1" sz="2000">
+                <a:solidFill>
+                  <a:srgbClr val="333333"/>
+                </a:solidFill>
+              </a:defRPr>
+            </a:pPr>
+            <a:r>
+              <a:t>Using Custom Exceptions:</a:t>
+            </a:r>
+          </a:p>
+          <a:p>
+            <a:pPr>
+              <a:spcAft>
+                <a:spcPts val="600"/>
+              </a:spcAft>
+              <a:defRPr b="1" sz="2000">
+                <a:solidFill>
+                  <a:srgbClr val="333333"/>
+                </a:solidFill>
+              </a:defRPr>
+            </a:pPr>
+            <a:r>
+              <a:t>def validate_age(age):</a:t>
+            </a:r>
+          </a:p>
+          <a:p>
+            <a:pPr>
+              <a:spcAft>
+                <a:spcPts val="600"/>
+              </a:spcAft>
+              <a:defRPr sz="1600">
+                <a:solidFill>
+                  <a:srgbClr val="333333"/>
+                </a:solidFill>
+              </a:defRPr>
+            </a:pPr>
+            <a:r>
+              <a:t>    if age &lt; 0:</a:t>
+            </a:r>
+          </a:p>
+          <a:p>
+            <a:pPr>
+              <a:spcAft>
+                <a:spcPts val="600"/>
+              </a:spcAft>
+              <a:defRPr sz="1600">
+                <a:solidFill>
+                  <a:srgbClr val="333333"/>
+                </a:solidFill>
+              </a:defRPr>
+            </a:pPr>
+            <a:r>
+              <a:t>        raise InvalidAgeError("Age must be positive")</a:t>
+            </a:r>
+          </a:p>
+          <a:p>
+            <a:pPr>
+              <a:spcAft>
+                <a:spcPts val="600"/>
+              </a:spcAft>
+              <a:defRPr b="1" sz="2000">
+                <a:solidFill>
+                  <a:srgbClr val="333333"/>
+                </a:solidFill>
+              </a:defRPr>
+            </a:pPr>
+            <a:r>
+              <a:t>try:</a:t>
+            </a:r>
+          </a:p>
+          <a:p>
+            <a:pPr>
+              <a:spcAft>
+                <a:spcPts val="600"/>
+              </a:spcAft>
+              <a:defRPr sz="1600">
+                <a:solidFill>
+                  <a:srgbClr val="333333"/>
+                </a:solidFill>
+              </a:defRPr>
+            </a:pPr>
+            <a:r>
+              <a:t>    validate_age(-5)</a:t>
+            </a:r>
+          </a:p>
+          <a:p>
+            <a:pPr>
+              <a:spcAft>
+                <a:spcPts val="600"/>
+              </a:spcAft>
+              <a:defRPr b="1" sz="2000">
+                <a:solidFill>
+                  <a:srgbClr val="333333"/>
+                </a:solidFill>
+              </a:defRPr>
+            </a:pPr>
+            <a:r>
+              <a:t>except InvalidAgeError as e:</a:t>
+            </a:r>
+          </a:p>
+          <a:p>
+            <a:pPr>
+              <a:spcAft>
+                <a:spcPts val="600"/>
+              </a:spcAft>
+              <a:defRPr sz="1600">
+                <a:solidFill>
+                  <a:srgbClr val="333333"/>
+                </a:solidFill>
+              </a:defRPr>
+            </a:pPr>
+            <a:r>
+              <a:t>    print(f"Validation error: {e}")</a:t>
+            </a:r>
+          </a:p>
+          <a:p>
+            <a:pPr>
+              <a:spcAft>
+                <a:spcPts val="600"/>
+              </a:spcAft>
+              <a:defRPr b="1" sz="2000">
+                <a:solidFill>
+                  <a:srgbClr val="333333"/>
+                </a:solidFill>
+              </a:defRPr>
+            </a:pPr>
+            <a:r>
+              <a:t>When to Use:</a:t>
             </a:r>
           </a:p>
           <a:p>
             <a:pPr lvl="1">
               <a:spcAft>
-                <a:spcPts val="800"/>
-              </a:spcAft>
-              <a:defRPr sz="1800">
-                <a:solidFill>
-                  <a:srgbClr val="333333"/>
-                </a:solidFill>
-              </a:defRPr>
-            </a:pPr>
-            <a:r>
-              <a:t>• ✓ User types "abc" → ValueError caught</a:t>
+                <a:spcPts val="400"/>
+              </a:spcAft>
+              <a:defRPr sz="1600">
+                <a:solidFill>
+                  <a:srgbClr val="333333"/>
+                </a:solidFill>
+              </a:defRPr>
+            </a:pPr>
+            <a:r>
+              <a:t>• Domain-specific errors</a:t>
             </a:r>
           </a:p>
           <a:p>
             <a:pPr lvl="1">
               <a:spcAft>
-                <a:spcPts val="800"/>
-              </a:spcAft>
-              <a:defRPr sz="1800">
-                <a:solidFill>
-                  <a:srgbClr val="333333"/>
-                </a:solidFill>
-              </a:defRPr>
-            </a:pPr>
-            <a:r>
-              <a:t>• ✓ User types "0" → ZeroDivisionError caught</a:t>
+                <a:spcPts val="400"/>
+              </a:spcAft>
+              <a:defRPr sz="1600">
+                <a:solidFill>
+                  <a:srgbClr val="333333"/>
+                </a:solidFill>
+              </a:defRPr>
+            </a:pPr>
+            <a:r>
+              <a:t>• Better error clarity</a:t>
             </a:r>
           </a:p>
           <a:p>
             <a:pPr lvl="1">
               <a:spcAft>
-                <a:spcPts val="800"/>
-              </a:spcAft>
-              <a:defRPr sz="1800">
-                <a:solidFill>
-                  <a:srgbClr val="333333"/>
-                </a:solidFill>
-              </a:defRPr>
-            </a:pPr>
-            <a:r>
-              <a:t>• ✓ User types "5" → Success!</a:t>
+                <a:spcPts val="400"/>
+              </a:spcAft>
+              <a:defRPr sz="1600">
+                <a:solidFill>
+                  <a:srgbClr val="333333"/>
+                </a:solidFill>
+              </a:defRPr>
+            </a:pPr>
+            <a:r>
+              <a:t>• Custom error handling</a:t>
             </a:r>
           </a:p>
         </p:txBody>
@@ -6008,7 +6780,7 @@
 </p:sld>
 </file>
 
-<file path=ppt/slides/slide6.xml><?xml version="1.0" encoding="utf-8"?>
+<file path=ppt/slides/slide8.xml><?xml version="1.0" encoding="utf-8"?>
 <p:sld xmlns:a="http://schemas.openxmlformats.org/drawingml/2006/main" xmlns:p="http://schemas.openxmlformats.org/presentationml/2006/main" xmlns:r="http://schemas.openxmlformats.org/officeDocument/2006/relationships">
   <p:cSld>
     <p:spTree>
@@ -6112,8 +6884,8 @@
         </p:nvSpPr>
         <p:spPr>
           <a:xfrm>
-            <a:off x="457200" y="365760"/>
-            <a:ext cx="10972800" cy="731520"/>
+            <a:off x="457200" y="320040"/>
+            <a:ext cx="10972800" cy="640080"/>
           </a:xfrm>
           <a:prstGeom prst="rect">
             <a:avLst/>
@@ -6127,71 +6899,28 @@
           <a:lstStyle/>
           <a:p>
             <a:pPr>
-              <a:defRPr sz="4000" b="1">
+              <a:defRPr sz="3600" b="1">
                 <a:solidFill>
                   <a:srgbClr val="003366"/>
                 </a:solidFill>
               </a:defRPr>
             </a:pPr>
             <a:r>
-              <a:t>The else Clause</a:t>
-            </a:r>
-          </a:p>
-        </p:txBody>
-      </p:sp>
-      <p:sp>
-        <p:nvSpPr>
-          <p:cNvPr id="5" name="Rectangle 4"/>
-          <p:cNvSpPr/>
+              <a:t>Validation Patterns</a:t>
+            </a:r>
+          </a:p>
+        </p:txBody>
+      </p:sp>
+      <p:sp>
+        <p:nvSpPr>
+          <p:cNvPr id="5" name="TextBox 4"/>
+          <p:cNvSpPr txBox="1"/>
           <p:nvPr/>
         </p:nvSpPr>
         <p:spPr>
           <a:xfrm>
-            <a:off x="457200" y="1005840"/>
-            <a:ext cx="1828800" cy="45720"/>
-          </a:xfrm>
-          <a:prstGeom prst="rect">
-            <a:avLst/>
-          </a:prstGeom>
-          <a:solidFill>
-            <a:srgbClr val="0066CC"/>
-          </a:solidFill>
-          <a:ln>
-            <a:noFill/>
-          </a:ln>
-        </p:spPr>
-        <p:style>
-          <a:lnRef idx="1">
-            <a:schemeClr val="accent1"/>
-          </a:lnRef>
-          <a:fillRef idx="3">
-            <a:schemeClr val="accent1"/>
-          </a:fillRef>
-          <a:effectRef idx="2">
-            <a:schemeClr val="accent1"/>
-          </a:effectRef>
-          <a:fontRef idx="minor">
-            <a:schemeClr val="lt1"/>
-          </a:fontRef>
-        </p:style>
-        <p:txBody>
-          <a:bodyPr rtlCol="0" anchor="ctr"/>
-          <a:lstStyle/>
-          <a:p>
-            <a:pPr algn="ctr"/>
-          </a:p>
-        </p:txBody>
-      </p:sp>
-      <p:sp>
-        <p:nvSpPr>
-          <p:cNvPr id="6" name="TextBox 5"/>
-          <p:cNvSpPr txBox="1"/>
-          <p:nvPr/>
-        </p:nvSpPr>
-        <p:spPr>
-          <a:xfrm>
-            <a:off x="640080" y="1371600"/>
-            <a:ext cx="10789920" cy="4572000"/>
+            <a:off x="640080" y="1188720"/>
+            <a:ext cx="10789920" cy="5303520"/>
           </a:xfrm>
           <a:prstGeom prst="rect">
             <a:avLst/>
@@ -6206,76 +6935,331 @@
           <a:p>
             <a:pPr>
               <a:spcAft>
-                <a:spcPts val="800"/>
-              </a:spcAft>
-              <a:defRPr sz="2000" b="1">
-                <a:solidFill>
-                  <a:srgbClr val="333333"/>
-                </a:solidFill>
-              </a:defRPr>
-            </a:pPr>
-            <a:r>
-              <a:t>Theelseblock runsonly if NO exception occurred!</a:t>
-            </a:r>
-          </a:p>
-          <a:p>
-            <a:pPr>
-              <a:spcAft>
-                <a:spcPts val="800"/>
-              </a:spcAft>
-              <a:defRPr sz="2000" b="1">
-                <a:solidFill>
-                  <a:srgbClr val="333333"/>
-                </a:solidFill>
-              </a:defRPr>
-            </a:pPr>
-            <a:r>
-              <a:t>If Error Occurs:</a:t>
-            </a:r>
-          </a:p>
-          <a:p>
-            <a:pPr>
-              <a:spcAft>
-                <a:spcPts val="800"/>
-              </a:spcAft>
-              <a:defRPr sz="2000" b="1">
-                <a:solidFill>
-                  <a:srgbClr val="333333"/>
-                </a:solidFill>
-              </a:defRPr>
-            </a:pPr>
-            <a:r>
-              <a:t>❌ Try block stops✓ Except block runs❌ Else block skipped</a:t>
-            </a:r>
-          </a:p>
-          <a:p>
-            <a:pPr>
-              <a:spcAft>
-                <a:spcPts val="800"/>
-              </a:spcAft>
-              <a:defRPr sz="2000" b="1">
-                <a:solidFill>
-                  <a:srgbClr val="333333"/>
-                </a:solidFill>
-              </a:defRPr>
-            </a:pPr>
-            <a:r>
-              <a:t>If No Error:</a:t>
-            </a:r>
-          </a:p>
-          <a:p>
-            <a:pPr>
-              <a:spcAft>
-                <a:spcPts val="800"/>
-              </a:spcAft>
-              <a:defRPr sz="2000" b="1">
-                <a:solidFill>
-                  <a:srgbClr val="333333"/>
-                </a:solidFill>
-              </a:defRPr>
-            </a:pPr>
-            <a:r>
-              <a:t>✓ Try block completes❌ Except block skipped✓ Else block runs</a:t>
+                <a:spcPts val="600"/>
+              </a:spcAft>
+              <a:defRPr b="1" sz="2000">
+                <a:solidFill>
+                  <a:srgbClr val="333333"/>
+                </a:solidFill>
+              </a:defRPr>
+            </a:pPr>
+            <a:r>
+              <a:t>Pattern 1: Retry Loop</a:t>
+            </a:r>
+          </a:p>
+          <a:p>
+            <a:pPr>
+              <a:spcAft>
+                <a:spcPts val="600"/>
+              </a:spcAft>
+              <a:defRPr b="1" sz="2000">
+                <a:solidFill>
+                  <a:srgbClr val="333333"/>
+                </a:solidFill>
+              </a:defRPr>
+            </a:pPr>
+            <a:r>
+              <a:t>while True:</a:t>
+            </a:r>
+          </a:p>
+          <a:p>
+            <a:pPr>
+              <a:spcAft>
+                <a:spcPts val="600"/>
+              </a:spcAft>
+              <a:defRPr sz="1600">
+                <a:solidFill>
+                  <a:srgbClr val="333333"/>
+                </a:solidFill>
+              </a:defRPr>
+            </a:pPr>
+            <a:r>
+              <a:t>    try:</a:t>
+            </a:r>
+          </a:p>
+          <a:p>
+            <a:pPr>
+              <a:spcAft>
+                <a:spcPts val="600"/>
+              </a:spcAft>
+              <a:defRPr sz="1600">
+                <a:solidFill>
+                  <a:srgbClr val="333333"/>
+                </a:solidFill>
+              </a:defRPr>
+            </a:pPr>
+            <a:r>
+              <a:t>        age = int(input("Age: "))</a:t>
+            </a:r>
+          </a:p>
+          <a:p>
+            <a:pPr>
+              <a:spcAft>
+                <a:spcPts val="600"/>
+              </a:spcAft>
+              <a:defRPr sz="1600">
+                <a:solidFill>
+                  <a:srgbClr val="333333"/>
+                </a:solidFill>
+              </a:defRPr>
+            </a:pPr>
+            <a:r>
+              <a:t>        if age &lt; 0:</a:t>
+            </a:r>
+          </a:p>
+          <a:p>
+            <a:pPr>
+              <a:spcAft>
+                <a:spcPts val="600"/>
+              </a:spcAft>
+              <a:defRPr sz="1600">
+                <a:solidFill>
+                  <a:srgbClr val="333333"/>
+                </a:solidFill>
+              </a:defRPr>
+            </a:pPr>
+            <a:r>
+              <a:t>            print("Must be positive")</a:t>
+            </a:r>
+          </a:p>
+          <a:p>
+            <a:pPr>
+              <a:spcAft>
+                <a:spcPts val="600"/>
+              </a:spcAft>
+              <a:defRPr sz="1600">
+                <a:solidFill>
+                  <a:srgbClr val="333333"/>
+                </a:solidFill>
+              </a:defRPr>
+            </a:pPr>
+            <a:r>
+              <a:t>            continue</a:t>
+            </a:r>
+          </a:p>
+          <a:p>
+            <a:pPr>
+              <a:spcAft>
+                <a:spcPts val="600"/>
+              </a:spcAft>
+              <a:defRPr sz="1600">
+                <a:solidFill>
+                  <a:srgbClr val="333333"/>
+                </a:solidFill>
+              </a:defRPr>
+            </a:pPr>
+            <a:r>
+              <a:t>        break</a:t>
+            </a:r>
+          </a:p>
+          <a:p>
+            <a:pPr>
+              <a:spcAft>
+                <a:spcPts val="600"/>
+              </a:spcAft>
+              <a:defRPr sz="1600">
+                <a:solidFill>
+                  <a:srgbClr val="333333"/>
+                </a:solidFill>
+              </a:defRPr>
+            </a:pPr>
+            <a:r>
+              <a:t>    except ValueError:</a:t>
+            </a:r>
+          </a:p>
+          <a:p>
+            <a:pPr>
+              <a:spcAft>
+                <a:spcPts val="600"/>
+              </a:spcAft>
+              <a:defRPr sz="1600">
+                <a:solidFill>
+                  <a:srgbClr val="333333"/>
+                </a:solidFill>
+              </a:defRPr>
+            </a:pPr>
+            <a:r>
+              <a:t>        print("Enter a number")</a:t>
+            </a:r>
+          </a:p>
+          <a:p>
+            <a:pPr>
+              <a:spcAft>
+                <a:spcPts val="600"/>
+              </a:spcAft>
+              <a:defRPr b="1" sz="2000">
+                <a:solidFill>
+                  <a:srgbClr val="333333"/>
+                </a:solidFill>
+              </a:defRPr>
+            </a:pPr>
+            <a:r>
+              <a:t>Pattern 2: Default Value</a:t>
+            </a:r>
+          </a:p>
+          <a:p>
+            <a:pPr>
+              <a:spcAft>
+                <a:spcPts val="600"/>
+              </a:spcAft>
+              <a:defRPr b="1" sz="2000">
+                <a:solidFill>
+                  <a:srgbClr val="333333"/>
+                </a:solidFill>
+              </a:defRPr>
+            </a:pPr>
+            <a:r>
+              <a:t>try:</a:t>
+            </a:r>
+          </a:p>
+          <a:p>
+            <a:pPr>
+              <a:spcAft>
+                <a:spcPts val="600"/>
+              </a:spcAft>
+              <a:defRPr sz="1600">
+                <a:solidFill>
+                  <a:srgbClr val="333333"/>
+                </a:solidFill>
+              </a:defRPr>
+            </a:pPr>
+            <a:r>
+              <a:t>    config = load_config()</a:t>
+            </a:r>
+          </a:p>
+          <a:p>
+            <a:pPr>
+              <a:spcAft>
+                <a:spcPts val="600"/>
+              </a:spcAft>
+              <a:defRPr b="1" sz="2000">
+                <a:solidFill>
+                  <a:srgbClr val="333333"/>
+                </a:solidFill>
+              </a:defRPr>
+            </a:pPr>
+            <a:r>
+              <a:t>except FileNotFoundError:</a:t>
+            </a:r>
+          </a:p>
+          <a:p>
+            <a:pPr>
+              <a:spcAft>
+                <a:spcPts val="600"/>
+              </a:spcAft>
+              <a:defRPr sz="1600">
+                <a:solidFill>
+                  <a:srgbClr val="333333"/>
+                </a:solidFill>
+              </a:defRPr>
+            </a:pPr>
+            <a:r>
+              <a:t>    config = default_config()</a:t>
+            </a:r>
+          </a:p>
+          <a:p>
+            <a:pPr>
+              <a:spcAft>
+                <a:spcPts val="600"/>
+              </a:spcAft>
+              <a:defRPr b="1" sz="2000">
+                <a:solidFill>
+                  <a:srgbClr val="333333"/>
+                </a:solidFill>
+              </a:defRPr>
+            </a:pPr>
+            <a:r>
+              <a:t>Pattern 3: Validation Function</a:t>
+            </a:r>
+          </a:p>
+          <a:p>
+            <a:pPr>
+              <a:spcAft>
+                <a:spcPts val="600"/>
+              </a:spcAft>
+              <a:defRPr b="1" sz="2000">
+                <a:solidFill>
+                  <a:srgbClr val="333333"/>
+                </a:solidFill>
+              </a:defRPr>
+            </a:pPr>
+            <a:r>
+              <a:t>def get_valid_int(prompt):</a:t>
+            </a:r>
+          </a:p>
+          <a:p>
+            <a:pPr>
+              <a:spcAft>
+                <a:spcPts val="600"/>
+              </a:spcAft>
+              <a:defRPr sz="1600">
+                <a:solidFill>
+                  <a:srgbClr val="333333"/>
+                </a:solidFill>
+              </a:defRPr>
+            </a:pPr>
+            <a:r>
+              <a:t>    while True:</a:t>
+            </a:r>
+          </a:p>
+          <a:p>
+            <a:pPr>
+              <a:spcAft>
+                <a:spcPts val="600"/>
+              </a:spcAft>
+              <a:defRPr sz="1600">
+                <a:solidFill>
+                  <a:srgbClr val="333333"/>
+                </a:solidFill>
+              </a:defRPr>
+            </a:pPr>
+            <a:r>
+              <a:t>        try:</a:t>
+            </a:r>
+          </a:p>
+          <a:p>
+            <a:pPr>
+              <a:spcAft>
+                <a:spcPts val="600"/>
+              </a:spcAft>
+              <a:defRPr sz="1600">
+                <a:solidFill>
+                  <a:srgbClr val="333333"/>
+                </a:solidFill>
+              </a:defRPr>
+            </a:pPr>
+            <a:r>
+              <a:t>            return int(input(prompt))</a:t>
+            </a:r>
+          </a:p>
+          <a:p>
+            <a:pPr>
+              <a:spcAft>
+                <a:spcPts val="600"/>
+              </a:spcAft>
+              <a:defRPr sz="1600">
+                <a:solidFill>
+                  <a:srgbClr val="333333"/>
+                </a:solidFill>
+              </a:defRPr>
+            </a:pPr>
+            <a:r>
+              <a:t>        except ValueError:</a:t>
+            </a:r>
+          </a:p>
+          <a:p>
+            <a:pPr>
+              <a:spcAft>
+                <a:spcPts val="600"/>
+              </a:spcAft>
+              <a:defRPr sz="1600">
+                <a:solidFill>
+                  <a:srgbClr val="333333"/>
+                </a:solidFill>
+              </a:defRPr>
+            </a:pPr>
+            <a:r>
+              <a:t>            print("Invalid number")</a:t>
             </a:r>
           </a:p>
         </p:txBody>
@@ -6288,7 +7272,7 @@
 </p:sld>
 </file>
 
-<file path=ppt/slides/slide7.xml><?xml version="1.0" encoding="utf-8"?>
+<file path=ppt/slides/slide9.xml><?xml version="1.0" encoding="utf-8"?>
 <p:sld xmlns:a="http://schemas.openxmlformats.org/drawingml/2006/main" xmlns:p="http://schemas.openxmlformats.org/presentationml/2006/main" xmlns:r="http://schemas.openxmlformats.org/officeDocument/2006/relationships">
   <p:cSld>
     <p:spTree>
@@ -6392,8 +7376,8 @@
         </p:nvSpPr>
         <p:spPr>
           <a:xfrm>
-            <a:off x="457200" y="365760"/>
-            <a:ext cx="10972800" cy="731520"/>
+            <a:off x="457200" y="320040"/>
+            <a:ext cx="10972800" cy="640080"/>
           </a:xfrm>
           <a:prstGeom prst="rect">
             <a:avLst/>
@@ -6407,71 +7391,28 @@
           <a:lstStyle/>
           <a:p>
             <a:pPr>
-              <a:defRPr sz="4000" b="1">
+              <a:defRPr sz="3600" b="1">
                 <a:solidFill>
                   <a:srgbClr val="003366"/>
                 </a:solidFill>
               </a:defRPr>
             </a:pPr>
             <a:r>
-              <a:t>The finally Clause</a:t>
-            </a:r>
-          </a:p>
-        </p:txBody>
-      </p:sp>
-      <p:sp>
-        <p:nvSpPr>
-          <p:cNvPr id="5" name="Rectangle 4"/>
-          <p:cNvSpPr/>
+              <a:t>Best Practices</a:t>
+            </a:r>
+          </a:p>
+        </p:txBody>
+      </p:sp>
+      <p:sp>
+        <p:nvSpPr>
+          <p:cNvPr id="5" name="TextBox 4"/>
+          <p:cNvSpPr txBox="1"/>
           <p:nvPr/>
         </p:nvSpPr>
         <p:spPr>
           <a:xfrm>
-            <a:off x="457200" y="1005840"/>
-            <a:ext cx="1828800" cy="45720"/>
-          </a:xfrm>
-          <a:prstGeom prst="rect">
-            <a:avLst/>
-          </a:prstGeom>
-          <a:solidFill>
-            <a:srgbClr val="0066CC"/>
-          </a:solidFill>
-          <a:ln>
-            <a:noFill/>
-          </a:ln>
-        </p:spPr>
-        <p:style>
-          <a:lnRef idx="1">
-            <a:schemeClr val="accent1"/>
-          </a:lnRef>
-          <a:fillRef idx="3">
-            <a:schemeClr val="accent1"/>
-          </a:fillRef>
-          <a:effectRef idx="2">
-            <a:schemeClr val="accent1"/>
-          </a:effectRef>
-          <a:fontRef idx="minor">
-            <a:schemeClr val="lt1"/>
-          </a:fontRef>
-        </p:style>
-        <p:txBody>
-          <a:bodyPr rtlCol="0" anchor="ctr"/>
-          <a:lstStyle/>
-          <a:p>
-            <a:pPr algn="ctr"/>
-          </a:p>
-        </p:txBody>
-      </p:sp>
-      <p:sp>
-        <p:nvSpPr>
-          <p:cNvPr id="6" name="TextBox 5"/>
-          <p:cNvSpPr txBox="1"/>
-          <p:nvPr/>
-        </p:nvSpPr>
-        <p:spPr>
-          <a:xfrm>
-            <a:off x="640080" y="1371600"/>
-            <a:ext cx="10789920" cy="4572000"/>
+            <a:off x="640080" y="1188720"/>
+            <a:ext cx="10789920" cy="5303520"/>
           </a:xfrm>
           <a:prstGeom prst="rect">
             <a:avLst/>
@@ -6486,427 +7427,331 @@
           <a:p>
             <a:pPr>
               <a:spcAft>
-                <a:spcPts val="800"/>
-              </a:spcAft>
-              <a:defRPr sz="2000" b="1">
-                <a:solidFill>
-                  <a:srgbClr val="333333"/>
-                </a:solidFill>
-              </a:defRPr>
-            </a:pPr>
-            <a:r>
-              <a:t>ThefinallyblockALWAYS runs- error or not!</a:t>
-            </a:r>
-          </a:p>
-          <a:p>
-            <a:pPr>
-              <a:spcAft>
-                <a:spcPts val="800"/>
-              </a:spcAft>
-              <a:defRPr sz="2000" b="1">
-                <a:solidFill>
-                  <a:srgbClr val="333333"/>
-                </a:solidFill>
-              </a:defRPr>
-            </a:pPr>
-            <a:r>
-              <a:t>Perfect For:</a:t>
-            </a:r>
-          </a:p>
-        </p:txBody>
-      </p:sp>
-    </p:spTree>
-  </p:cSld>
-  <p:clrMapOvr>
-    <a:masterClrMapping/>
-  </p:clrMapOvr>
-</p:sld>
-</file>
-
-<file path=ppt/slides/slide8.xml><?xml version="1.0" encoding="utf-8"?>
-<p:sld xmlns:a="http://schemas.openxmlformats.org/drawingml/2006/main" xmlns:p="http://schemas.openxmlformats.org/presentationml/2006/main" xmlns:r="http://schemas.openxmlformats.org/officeDocument/2006/relationships">
-  <p:cSld>
-    <p:spTree>
-      <p:nvGrpSpPr>
-        <p:cNvPr id="1" name=""/>
-        <p:cNvGrpSpPr/>
-        <p:nvPr/>
-      </p:nvGrpSpPr>
-      <p:grpSpPr/>
-      <p:sp>
-        <p:nvSpPr>
-          <p:cNvPr id="2" name="Rectangle 1"/>
-          <p:cNvSpPr/>
-          <p:nvPr/>
-        </p:nvSpPr>
-        <p:spPr>
-          <a:xfrm>
-            <a:off x="0" y="0"/>
-            <a:ext cx="12191695" cy="6858000"/>
-          </a:xfrm>
-          <a:prstGeom prst="rect">
-            <a:avLst/>
-          </a:prstGeom>
-          <a:solidFill>
-            <a:srgbClr val="FFFFFF"/>
-          </a:solidFill>
-          <a:ln>
-            <a:noFill/>
-          </a:ln>
-        </p:spPr>
-        <p:style>
-          <a:lnRef idx="1">
-            <a:schemeClr val="accent1"/>
-          </a:lnRef>
-          <a:fillRef idx="3">
-            <a:schemeClr val="accent1"/>
-          </a:fillRef>
-          <a:effectRef idx="2">
-            <a:schemeClr val="accent1"/>
-          </a:effectRef>
-          <a:fontRef idx="minor">
-            <a:schemeClr val="lt1"/>
-          </a:fontRef>
-        </p:style>
-        <p:txBody>
-          <a:bodyPr rtlCol="0" anchor="ctr"/>
-          <a:lstStyle/>
-          <a:p>
-            <a:pPr algn="ctr"/>
-          </a:p>
-        </p:txBody>
-      </p:sp>
-      <p:sp>
-        <p:nvSpPr>
-          <p:cNvPr id="3" name="Rectangle 2"/>
-          <p:cNvSpPr/>
-          <p:nvPr/>
-        </p:nvSpPr>
-        <p:spPr>
-          <a:xfrm>
-            <a:off x="0" y="0"/>
-            <a:ext cx="12191695" cy="137160"/>
-          </a:xfrm>
-          <a:prstGeom prst="rect">
-            <a:avLst/>
-          </a:prstGeom>
-          <a:solidFill>
-            <a:srgbClr val="0066CC"/>
-          </a:solidFill>
-          <a:ln>
-            <a:noFill/>
-          </a:ln>
-        </p:spPr>
-        <p:style>
-          <a:lnRef idx="1">
-            <a:schemeClr val="accent1"/>
-          </a:lnRef>
-          <a:fillRef idx="3">
-            <a:schemeClr val="accent1"/>
-          </a:fillRef>
-          <a:effectRef idx="2">
-            <a:schemeClr val="accent1"/>
-          </a:effectRef>
-          <a:fontRef idx="minor">
-            <a:schemeClr val="lt1"/>
-          </a:fontRef>
-        </p:style>
-        <p:txBody>
-          <a:bodyPr rtlCol="0" anchor="ctr"/>
-          <a:lstStyle/>
-          <a:p>
-            <a:pPr algn="ctr"/>
-          </a:p>
-        </p:txBody>
-      </p:sp>
-      <p:sp>
-        <p:nvSpPr>
-          <p:cNvPr id="4" name="TextBox 3"/>
-          <p:cNvSpPr txBox="1"/>
-          <p:nvPr/>
-        </p:nvSpPr>
-        <p:spPr>
-          <a:xfrm>
-            <a:off x="457200" y="365760"/>
-            <a:ext cx="10972800" cy="731520"/>
-          </a:xfrm>
-          <a:prstGeom prst="rect">
-            <a:avLst/>
-          </a:prstGeom>
-          <a:noFill/>
-        </p:spPr>
-        <p:txBody>
-          <a:bodyPr wrap="none">
-            <a:spAutoFit/>
-          </a:bodyPr>
-          <a:lstStyle/>
-          <a:p>
-            <a:pPr>
-              <a:defRPr sz="4000" b="1">
-                <a:solidFill>
-                  <a:srgbClr val="003366"/>
-                </a:solidFill>
-              </a:defRPr>
-            </a:pPr>
-            <a:r>
-              <a:t>Raising Exceptions</a:t>
-            </a:r>
-          </a:p>
-        </p:txBody>
-      </p:sp>
-      <p:sp>
-        <p:nvSpPr>
-          <p:cNvPr id="5" name="Rectangle 4"/>
-          <p:cNvSpPr/>
-          <p:nvPr/>
-        </p:nvSpPr>
-        <p:spPr>
-          <a:xfrm>
-            <a:off x="457200" y="1005840"/>
-            <a:ext cx="1828800" cy="45720"/>
-          </a:xfrm>
-          <a:prstGeom prst="rect">
-            <a:avLst/>
-          </a:prstGeom>
-          <a:solidFill>
-            <a:srgbClr val="0066CC"/>
-          </a:solidFill>
-          <a:ln>
-            <a:noFill/>
-          </a:ln>
-        </p:spPr>
-        <p:style>
-          <a:lnRef idx="1">
-            <a:schemeClr val="accent1"/>
-          </a:lnRef>
-          <a:fillRef idx="3">
-            <a:schemeClr val="accent1"/>
-          </a:fillRef>
-          <a:effectRef idx="2">
-            <a:schemeClr val="accent1"/>
-          </a:effectRef>
-          <a:fontRef idx="minor">
-            <a:schemeClr val="lt1"/>
-          </a:fontRef>
-        </p:style>
-        <p:txBody>
-          <a:bodyPr rtlCol="0" anchor="ctr"/>
-          <a:lstStyle/>
-          <a:p>
-            <a:pPr algn="ctr"/>
-          </a:p>
-        </p:txBody>
-      </p:sp>
-      <p:sp>
-        <p:nvSpPr>
-          <p:cNvPr id="6" name="TextBox 5"/>
-          <p:cNvSpPr txBox="1"/>
-          <p:nvPr/>
-        </p:nvSpPr>
-        <p:spPr>
-          <a:xfrm>
-            <a:off x="640080" y="1371600"/>
-            <a:ext cx="10789920" cy="4572000"/>
-          </a:xfrm>
-          <a:prstGeom prst="rect">
-            <a:avLst/>
-          </a:prstGeom>
-          <a:noFill/>
-        </p:spPr>
-        <p:txBody>
-          <a:bodyPr wrap="square">
-            <a:spAutoFit/>
-          </a:bodyPr>
-          <a:lstStyle/>
-          <a:p>
-            <a:pPr>
-              <a:spcAft>
-                <a:spcPts val="800"/>
-              </a:spcAft>
-              <a:defRPr sz="2000" b="1">
-                <a:solidFill>
-                  <a:srgbClr val="333333"/>
-                </a:solidFill>
-              </a:defRPr>
-            </a:pPr>
-            <a:r>
-              <a:t>You canraiseyour own exceptions when something is wrong!</a:t>
-            </a:r>
-          </a:p>
-          <a:p>
-            <a:pPr>
-              <a:spcAft>
-                <a:spcPts val="800"/>
-              </a:spcAft>
-              <a:defRPr sz="2000" b="1">
-                <a:solidFill>
-                  <a:srgbClr val="333333"/>
-                </a:solidFill>
-              </a:defRPr>
-            </a:pPr>
-            <a:r>
-              <a:t>Basic Syntax:</a:t>
-            </a:r>
-          </a:p>
-          <a:p>
-            <a:pPr>
-              <a:spcAft>
-                <a:spcPts val="800"/>
-              </a:spcAft>
-              <a:defRPr sz="2000" b="1">
-                <a:solidFill>
-                  <a:srgbClr val="333333"/>
-                </a:solidFill>
-              </a:defRPr>
-            </a:pPr>
-            <a:r>
-              <a:t>Valid Input:</a:t>
-            </a:r>
-          </a:p>
-          <a:p>
-            <a:pPr>
-              <a:spcAft>
-                <a:spcPts val="800"/>
-              </a:spcAft>
-              <a:defRPr sz="2000" b="1">
-                <a:solidFill>
-                  <a:srgbClr val="333333"/>
-                </a:solidFill>
-              </a:defRPr>
-            </a:pPr>
-            <a:r>
-              <a:t>Invalid Input:</a:t>
-            </a:r>
-          </a:p>
-        </p:txBody>
-      </p:sp>
-    </p:spTree>
-  </p:cSld>
-  <p:clrMapOvr>
-    <a:masterClrMapping/>
-  </p:clrMapOvr>
-</p:sld>
-</file>
-
-<file path=ppt/slides/slide9.xml><?xml version="1.0" encoding="utf-8"?>
-<p:sld xmlns:a="http://schemas.openxmlformats.org/drawingml/2006/main" xmlns:p="http://schemas.openxmlformats.org/presentationml/2006/main" xmlns:r="http://schemas.openxmlformats.org/officeDocument/2006/relationships">
-  <p:cSld>
-    <p:spTree>
-      <p:nvGrpSpPr>
-        <p:cNvPr id="1" name=""/>
-        <p:cNvGrpSpPr/>
-        <p:nvPr/>
-      </p:nvGrpSpPr>
-      <p:grpSpPr/>
-      <p:sp>
-        <p:nvSpPr>
-          <p:cNvPr id="2" name="Rectangle 1"/>
-          <p:cNvSpPr/>
-          <p:nvPr/>
-        </p:nvSpPr>
-        <p:spPr>
-          <a:xfrm>
-            <a:off x="0" y="0"/>
-            <a:ext cx="12191695" cy="6858000"/>
-          </a:xfrm>
-          <a:prstGeom prst="rect">
-            <a:avLst/>
-          </a:prstGeom>
-          <a:solidFill>
-            <a:srgbClr val="0066CC"/>
-          </a:solidFill>
-          <a:ln>
-            <a:noFill/>
-          </a:ln>
-        </p:spPr>
-        <p:style>
-          <a:lnRef idx="1">
-            <a:schemeClr val="accent1"/>
-          </a:lnRef>
-          <a:fillRef idx="3">
-            <a:schemeClr val="accent1"/>
-          </a:fillRef>
-          <a:effectRef idx="2">
-            <a:schemeClr val="accent1"/>
-          </a:effectRef>
-          <a:fontRef idx="minor">
-            <a:schemeClr val="lt1"/>
-          </a:fontRef>
-        </p:style>
-        <p:txBody>
-          <a:bodyPr rtlCol="0" anchor="ctr"/>
-          <a:lstStyle/>
-          <a:p>
-            <a:pPr algn="ctr"/>
-          </a:p>
-        </p:txBody>
-      </p:sp>
-      <p:sp>
-        <p:nvSpPr>
-          <p:cNvPr id="3" name="TextBox 2"/>
-          <p:cNvSpPr txBox="1"/>
-          <p:nvPr/>
-        </p:nvSpPr>
-        <p:spPr>
-          <a:xfrm>
-            <a:off x="914400" y="2286000"/>
-            <a:ext cx="10360152" cy="1371600"/>
-          </a:xfrm>
-          <a:prstGeom prst="rect">
-            <a:avLst/>
-          </a:prstGeom>
-          <a:noFill/>
-        </p:spPr>
-        <p:txBody>
-          <a:bodyPr wrap="none">
-            <a:spAutoFit/>
-          </a:bodyPr>
-          <a:lstStyle/>
-          <a:p>
-            <a:pPr algn="ctr">
-              <a:defRPr sz="4800" b="1">
-                <a:solidFill>
-                  <a:srgbClr val="FFFFFF"/>
-                </a:solidFill>
-              </a:defRPr>
-            </a:pPr>
-            <a:r>
-              <a:t>Best Practices for Error Handling</a:t>
-            </a:r>
-          </a:p>
-        </p:txBody>
-      </p:sp>
-      <p:sp>
-        <p:nvSpPr>
-          <p:cNvPr id="4" name="TextBox 3"/>
-          <p:cNvSpPr txBox="1"/>
-          <p:nvPr/>
-        </p:nvSpPr>
-        <p:spPr>
-          <a:xfrm>
-            <a:off x="914400" y="3840480"/>
-            <a:ext cx="10360152" cy="914400"/>
-          </a:xfrm>
-          <a:prstGeom prst="rect">
-            <a:avLst/>
-          </a:prstGeom>
-          <a:noFill/>
-        </p:spPr>
-        <p:txBody>
-          <a:bodyPr wrap="none">
-            <a:spAutoFit/>
-          </a:bodyPr>
-          <a:lstStyle/>
-          <a:p>
-            <a:pPr algn="ctr">
-              <a:defRPr sz="2400">
-                <a:solidFill>
-                  <a:srgbClr val="FFFFFF"/>
-                </a:solidFill>
-              </a:defRPr>
-            </a:pPr>
-            <a:r>
-              <a:t>✓ DO: Catch Specific Exceptions</a:t>
+                <a:spcPts val="600"/>
+              </a:spcAft>
+              <a:defRPr b="1" sz="2000">
+                <a:solidFill>
+                  <a:srgbClr val="333333"/>
+                </a:solidFill>
+              </a:defRPr>
+            </a:pPr>
+            <a:r>
+              <a:t>Be Specific:</a:t>
+            </a:r>
+          </a:p>
+          <a:p>
+            <a:pPr lvl="1">
+              <a:spcAft>
+                <a:spcPts val="400"/>
+              </a:spcAft>
+              <a:defRPr sz="1600">
+                <a:solidFill>
+                  <a:srgbClr val="333333"/>
+                </a:solidFill>
+              </a:defRPr>
+            </a:pPr>
+            <a:r>
+              <a:t>• Catch specific exceptions</a:t>
+            </a:r>
+          </a:p>
+          <a:p>
+            <a:pPr lvl="1">
+              <a:spcAft>
+                <a:spcPts val="400"/>
+              </a:spcAft>
+              <a:defRPr sz="1600">
+                <a:solidFill>
+                  <a:srgbClr val="333333"/>
+                </a:solidFill>
+              </a:defRPr>
+            </a:pPr>
+            <a:r>
+              <a:t>• Avoid bare except</a:t>
+            </a:r>
+          </a:p>
+          <a:p>
+            <a:pPr>
+              <a:spcAft>
+                <a:spcPts val="600"/>
+              </a:spcAft>
+              <a:defRPr b="1" sz="2000">
+                <a:solidFill>
+                  <a:srgbClr val="333333"/>
+                </a:solidFill>
+              </a:defRPr>
+            </a:pPr>
+            <a:r>
+              <a:t>try:</a:t>
+            </a:r>
+          </a:p>
+          <a:p>
+            <a:pPr>
+              <a:spcAft>
+                <a:spcPts val="600"/>
+              </a:spcAft>
+              <a:defRPr sz="1600">
+                <a:solidFill>
+                  <a:srgbClr val="333333"/>
+                </a:solidFill>
+              </a:defRPr>
+            </a:pPr>
+            <a:r>
+              <a:t>    value = int(input())</a:t>
+            </a:r>
+          </a:p>
+          <a:p>
+            <a:pPr>
+              <a:spcAft>
+                <a:spcPts val="600"/>
+              </a:spcAft>
+              <a:defRPr b="1" sz="2000">
+                <a:solidFill>
+                  <a:srgbClr val="333333"/>
+                </a:solidFill>
+              </a:defRPr>
+            </a:pPr>
+            <a:r>
+              <a:t>except ValueError:  # Good</a:t>
+            </a:r>
+          </a:p>
+          <a:p>
+            <a:pPr>
+              <a:spcAft>
+                <a:spcPts val="600"/>
+              </a:spcAft>
+              <a:defRPr sz="1600">
+                <a:solidFill>
+                  <a:srgbClr val="333333"/>
+                </a:solidFill>
+              </a:defRPr>
+            </a:pPr>
+            <a:r>
+              <a:t>    handle_error()</a:t>
+            </a:r>
+          </a:p>
+          <a:p>
+            <a:pPr>
+              <a:spcAft>
+                <a:spcPts val="600"/>
+              </a:spcAft>
+              <a:defRPr b="1" sz="2000">
+                <a:solidFill>
+                  <a:srgbClr val="333333"/>
+                </a:solidFill>
+              </a:defRPr>
+            </a:pPr>
+            <a:r>
+              <a:t>try:</a:t>
+            </a:r>
+          </a:p>
+          <a:p>
+            <a:pPr>
+              <a:spcAft>
+                <a:spcPts val="600"/>
+              </a:spcAft>
+              <a:defRPr sz="1600">
+                <a:solidFill>
+                  <a:srgbClr val="333333"/>
+                </a:solidFill>
+              </a:defRPr>
+            </a:pPr>
+            <a:r>
+              <a:t>    value = int(input())</a:t>
+            </a:r>
+          </a:p>
+          <a:p>
+            <a:pPr>
+              <a:spcAft>
+                <a:spcPts val="600"/>
+              </a:spcAft>
+              <a:defRPr b="1" sz="2000">
+                <a:solidFill>
+                  <a:srgbClr val="333333"/>
+                </a:solidFill>
+              </a:defRPr>
+            </a:pPr>
+            <a:r>
+              <a:t>except:  # Too broad</a:t>
+            </a:r>
+          </a:p>
+          <a:p>
+            <a:pPr>
+              <a:spcAft>
+                <a:spcPts val="600"/>
+              </a:spcAft>
+              <a:defRPr sz="1600">
+                <a:solidFill>
+                  <a:srgbClr val="333333"/>
+                </a:solidFill>
+              </a:defRPr>
+            </a:pPr>
+            <a:r>
+              <a:t>    handle_error()</a:t>
+            </a:r>
+          </a:p>
+          <a:p>
+            <a:pPr>
+              <a:spcAft>
+                <a:spcPts val="600"/>
+              </a:spcAft>
+              <a:defRPr b="1" sz="2000">
+                <a:solidFill>
+                  <a:srgbClr val="333333"/>
+                </a:solidFill>
+              </a:defRPr>
+            </a:pPr>
+            <a:r>
+              <a:t>Provide Context:</a:t>
+            </a:r>
+          </a:p>
+          <a:p>
+            <a:pPr lvl="1">
+              <a:spcAft>
+                <a:spcPts val="400"/>
+              </a:spcAft>
+              <a:defRPr sz="1600">
+                <a:solidFill>
+                  <a:srgbClr val="333333"/>
+                </a:solidFill>
+              </a:defRPr>
+            </a:pPr>
+            <a:r>
+              <a:t>• Helpful error messages</a:t>
+            </a:r>
+          </a:p>
+          <a:p>
+            <a:pPr lvl="1">
+              <a:spcAft>
+                <a:spcPts val="400"/>
+              </a:spcAft>
+              <a:defRPr sz="1600">
+                <a:solidFill>
+                  <a:srgbClr val="333333"/>
+                </a:solidFill>
+              </a:defRPr>
+            </a:pPr>
+            <a:r>
+              <a:t>• Explain what went wrong</a:t>
+            </a:r>
+          </a:p>
+          <a:p>
+            <a:pPr lvl="1">
+              <a:spcAft>
+                <a:spcPts val="400"/>
+              </a:spcAft>
+              <a:defRPr sz="1600">
+                <a:solidFill>
+                  <a:srgbClr val="333333"/>
+                </a:solidFill>
+              </a:defRPr>
+            </a:pPr>
+            <a:r>
+              <a:t>• Suggest solution</a:t>
+            </a:r>
+          </a:p>
+          <a:p>
+            <a:pPr>
+              <a:spcAft>
+                <a:spcPts val="600"/>
+              </a:spcAft>
+              <a:defRPr b="1" sz="2000">
+                <a:solidFill>
+                  <a:srgbClr val="333333"/>
+                </a:solidFill>
+              </a:defRPr>
+            </a:pPr>
+            <a:r>
+              <a:t>Don't Silence Errors:</a:t>
+            </a:r>
+          </a:p>
+          <a:p>
+            <a:pPr lvl="1">
+              <a:spcAft>
+                <a:spcPts val="400"/>
+              </a:spcAft>
+              <a:defRPr sz="1600">
+                <a:solidFill>
+                  <a:srgbClr val="333333"/>
+                </a:solidFill>
+              </a:defRPr>
+            </a:pPr>
+            <a:r>
+              <a:t>• Avoid empty except blocks</a:t>
+            </a:r>
+          </a:p>
+          <a:p>
+            <a:pPr lvl="1">
+              <a:spcAft>
+                <a:spcPts val="400"/>
+              </a:spcAft>
+              <a:defRPr sz="1600">
+                <a:solidFill>
+                  <a:srgbClr val="333333"/>
+                </a:solidFill>
+              </a:defRPr>
+            </a:pPr>
+            <a:r>
+              <a:t>• Log or handle appropriately</a:t>
+            </a:r>
+          </a:p>
+          <a:p>
+            <a:pPr>
+              <a:spcAft>
+                <a:spcPts val="600"/>
+              </a:spcAft>
+              <a:defRPr b="1" sz="2000">
+                <a:solidFill>
+                  <a:srgbClr val="333333"/>
+                </a:solidFill>
+              </a:defRPr>
+            </a:pPr>
+            <a:r>
+              <a:t>Use finally for Cleanup:</a:t>
+            </a:r>
+          </a:p>
+          <a:p>
+            <a:pPr lvl="1">
+              <a:spcAft>
+                <a:spcPts val="400"/>
+              </a:spcAft>
+              <a:defRPr sz="1600">
+                <a:solidFill>
+                  <a:srgbClr val="333333"/>
+                </a:solidFill>
+              </a:defRPr>
+            </a:pPr>
+            <a:r>
+              <a:t>• Close files</a:t>
+            </a:r>
+          </a:p>
+          <a:p>
+            <a:pPr lvl="1">
+              <a:spcAft>
+                <a:spcPts val="400"/>
+              </a:spcAft>
+              <a:defRPr sz="1600">
+                <a:solidFill>
+                  <a:srgbClr val="333333"/>
+                </a:solidFill>
+              </a:defRPr>
+            </a:pPr>
+            <a:r>
+              <a:t>• Release resources</a:t>
+            </a:r>
+          </a:p>
+          <a:p>
+            <a:pPr lvl="1">
+              <a:spcAft>
+                <a:spcPts val="400"/>
+              </a:spcAft>
+              <a:defRPr sz="1600">
+                <a:solidFill>
+                  <a:srgbClr val="333333"/>
+                </a:solidFill>
+              </a:defRPr>
+            </a:pPr>
+            <a:r>
+              <a:t>• Restore state</a:t>
             </a:r>
           </a:p>
         </p:txBody>
